--- a/Predictive_Maintenance_Presentation.pptx
+++ b/Predictive_Maintenance_Presentation.pptx
@@ -148,7 +148,7 @@
   <pc:docChgLst>
     <pc:chgData name="محمد رضا مصطفى علي" userId="c6ea1ee86786e35d" providerId="LiveId" clId="{471EB1E5-A5B5-4169-BAFF-97E1977EEA39}"/>
     <pc:docChg chg="undo custSel modSld">
-      <pc:chgData name="محمد رضا مصطفى علي" userId="c6ea1ee86786e35d" providerId="LiveId" clId="{471EB1E5-A5B5-4169-BAFF-97E1977EEA39}" dt="2026-08-25T01:36:52.907" v="51"/>
+      <pc:chgData name="محمد رضا مصطفى علي" userId="c6ea1ee86786e35d" providerId="LiveId" clId="{471EB1E5-A5B5-4169-BAFF-97E1977EEA39}" dt="2026-08-26T23:51:52.466" v="76" actId="1076"/>
       <pc:docMkLst>
         <pc:docMk/>
       </pc:docMkLst>
@@ -316,20 +316,52 @@
           </ac:spMkLst>
         </pc:spChg>
       </pc:sldChg>
-      <pc:sldChg chg="modSp mod modTransition">
-        <pc:chgData name="محمد رضا مصطفى علي" userId="c6ea1ee86786e35d" providerId="LiveId" clId="{471EB1E5-A5B5-4169-BAFF-97E1977EEA39}" dt="2026-08-25T01:36:52.907" v="51"/>
+      <pc:sldChg chg="addSp delSp modSp mod modTransition">
+        <pc:chgData name="محمد رضا مصطفى علي" userId="c6ea1ee86786e35d" providerId="LiveId" clId="{471EB1E5-A5B5-4169-BAFF-97E1977EEA39}" dt="2026-08-26T23:51:52.466" v="76" actId="1076"/>
         <pc:sldMkLst>
           <pc:docMk/>
           <pc:sldMk cId="0" sldId="276"/>
         </pc:sldMkLst>
         <pc:spChg chg="mod">
-          <ac:chgData name="محمد رضا مصطفى علي" userId="c6ea1ee86786e35d" providerId="LiveId" clId="{471EB1E5-A5B5-4169-BAFF-97E1977EEA39}" dt="2026-08-25T01:31:45.441" v="13" actId="207"/>
+          <ac:chgData name="محمد رضا مصطفى علي" userId="c6ea1ee86786e35d" providerId="LiveId" clId="{471EB1E5-A5B5-4169-BAFF-97E1977EEA39}" dt="2026-08-26T23:51:13.594" v="67" actId="1076"/>
           <ac:spMkLst>
             <pc:docMk/>
             <pc:sldMk cId="0" sldId="276"/>
             <ac:spMk id="2" creationId="{00000000-0000-0000-0000-000000000000}"/>
           </ac:spMkLst>
         </pc:spChg>
+        <pc:spChg chg="add del mod">
+          <ac:chgData name="محمد رضا مصطفى علي" userId="c6ea1ee86786e35d" providerId="LiveId" clId="{471EB1E5-A5B5-4169-BAFF-97E1977EEA39}" dt="2026-08-26T23:51:16.603" v="70"/>
+          <ac:spMkLst>
+            <pc:docMk/>
+            <pc:sldMk cId="0" sldId="276"/>
+            <ac:spMk id="9" creationId="{EA5D2917-9E27-1B33-2BB5-40E34ADBA12F}"/>
+          </ac:spMkLst>
+        </pc:spChg>
+        <pc:spChg chg="add mod">
+          <ac:chgData name="محمد رضا مصطفى علي" userId="c6ea1ee86786e35d" providerId="LiveId" clId="{471EB1E5-A5B5-4169-BAFF-97E1977EEA39}" dt="2026-08-26T23:51:52.466" v="76" actId="1076"/>
+          <ac:spMkLst>
+            <pc:docMk/>
+            <pc:sldMk cId="0" sldId="276"/>
+            <ac:spMk id="10" creationId="{DE78C1BE-8D7F-9CBE-3850-E55228E8B55A}"/>
+          </ac:spMkLst>
+        </pc:spChg>
+        <pc:picChg chg="add mod">
+          <ac:chgData name="محمد رضا مصطفى علي" userId="c6ea1ee86786e35d" providerId="LiveId" clId="{471EB1E5-A5B5-4169-BAFF-97E1977EEA39}" dt="2026-08-26T23:51:47.058" v="75" actId="1076"/>
+          <ac:picMkLst>
+            <pc:docMk/>
+            <pc:sldMk cId="0" sldId="276"/>
+            <ac:picMk id="4" creationId="{A02EFB75-B9DB-7A1C-1A98-41C6DA2EE079}"/>
+          </ac:picMkLst>
+        </pc:picChg>
+        <pc:cxnChg chg="add mod">
+          <ac:chgData name="محمد رضا مصطفى علي" userId="c6ea1ee86786e35d" providerId="LiveId" clId="{471EB1E5-A5B5-4169-BAFF-97E1977EEA39}" dt="2026-08-26T23:51:09.089" v="66" actId="1076"/>
+          <ac:cxnSpMkLst>
+            <pc:docMk/>
+            <pc:sldMk cId="0" sldId="276"/>
+            <ac:cxnSpMk id="6" creationId="{0C785CD7-AE2F-8A66-BD0B-DF22B86B016B}"/>
+          </ac:cxnSpMkLst>
+        </pc:cxnChg>
       </pc:sldChg>
     </pc:docChg>
   </pc:docChgLst>
@@ -515,7 +547,7 @@
           <a:p>
             <a:fld id="{5BCAD085-E8A6-8845-BD4E-CB4CCA059FC4}" type="datetimeFigureOut">
               <a:rPr lang="en-US" smtClean="0"/>
-              <a:t>8/25/2026</a:t>
+              <a:t>8/27/2026</a:t>
             </a:fld>
             <a:endParaRPr lang="en-US"/>
           </a:p>
@@ -683,7 +715,7 @@
           <a:p>
             <a:fld id="{5BCAD085-E8A6-8845-BD4E-CB4CCA059FC4}" type="datetimeFigureOut">
               <a:rPr lang="en-US" smtClean="0"/>
-              <a:t>8/25/2026</a:t>
+              <a:t>8/27/2026</a:t>
             </a:fld>
             <a:endParaRPr lang="en-US"/>
           </a:p>
@@ -861,7 +893,7 @@
           <a:p>
             <a:fld id="{5BCAD085-E8A6-8845-BD4E-CB4CCA059FC4}" type="datetimeFigureOut">
               <a:rPr lang="en-US" smtClean="0"/>
-              <a:t>8/25/2026</a:t>
+              <a:t>8/27/2026</a:t>
             </a:fld>
             <a:endParaRPr lang="en-US"/>
           </a:p>
@@ -1029,7 +1061,7 @@
           <a:p>
             <a:fld id="{5BCAD085-E8A6-8845-BD4E-CB4CCA059FC4}" type="datetimeFigureOut">
               <a:rPr lang="en-US" smtClean="0"/>
-              <a:t>8/25/2026</a:t>
+              <a:t>8/27/2026</a:t>
             </a:fld>
             <a:endParaRPr lang="en-US"/>
           </a:p>
@@ -1274,7 +1306,7 @@
           <a:p>
             <a:fld id="{5BCAD085-E8A6-8845-BD4E-CB4CCA059FC4}" type="datetimeFigureOut">
               <a:rPr lang="en-US" smtClean="0"/>
-              <a:t>8/25/2026</a:t>
+              <a:t>8/27/2026</a:t>
             </a:fld>
             <a:endParaRPr lang="en-US"/>
           </a:p>
@@ -1559,7 +1591,7 @@
           <a:p>
             <a:fld id="{5BCAD085-E8A6-8845-BD4E-CB4CCA059FC4}" type="datetimeFigureOut">
               <a:rPr lang="en-US" smtClean="0"/>
-              <a:t>8/25/2026</a:t>
+              <a:t>8/27/2026</a:t>
             </a:fld>
             <a:endParaRPr lang="en-US"/>
           </a:p>
@@ -1978,7 +2010,7 @@
           <a:p>
             <a:fld id="{5BCAD085-E8A6-8845-BD4E-CB4CCA059FC4}" type="datetimeFigureOut">
               <a:rPr lang="en-US" smtClean="0"/>
-              <a:t>8/25/2026</a:t>
+              <a:t>8/27/2026</a:t>
             </a:fld>
             <a:endParaRPr lang="en-US"/>
           </a:p>
@@ -2095,7 +2127,7 @@
           <a:p>
             <a:fld id="{5BCAD085-E8A6-8845-BD4E-CB4CCA059FC4}" type="datetimeFigureOut">
               <a:rPr lang="en-US" smtClean="0"/>
-              <a:t>8/25/2026</a:t>
+              <a:t>8/27/2026</a:t>
             </a:fld>
             <a:endParaRPr lang="en-US"/>
           </a:p>
@@ -2190,7 +2222,7 @@
           <a:p>
             <a:fld id="{5BCAD085-E8A6-8845-BD4E-CB4CCA059FC4}" type="datetimeFigureOut">
               <a:rPr lang="en-US" smtClean="0"/>
-              <a:t>8/25/2026</a:t>
+              <a:t>8/27/2026</a:t>
             </a:fld>
             <a:endParaRPr lang="en-US"/>
           </a:p>
@@ -2465,7 +2497,7 @@
           <a:p>
             <a:fld id="{5BCAD085-E8A6-8845-BD4E-CB4CCA059FC4}" type="datetimeFigureOut">
               <a:rPr lang="en-US" smtClean="0"/>
-              <a:t>8/25/2026</a:t>
+              <a:t>8/27/2026</a:t>
             </a:fld>
             <a:endParaRPr lang="en-US"/>
           </a:p>
@@ -2717,7 +2749,7 @@
           <a:p>
             <a:fld id="{5BCAD085-E8A6-8845-BD4E-CB4CCA059FC4}" type="datetimeFigureOut">
               <a:rPr lang="en-US" smtClean="0"/>
-              <a:t>8/25/2026</a:t>
+              <a:t>8/27/2026</a:t>
             </a:fld>
             <a:endParaRPr lang="en-US"/>
           </a:p>
@@ -2928,7 +2960,7 @@
           <a:p>
             <a:fld id="{5BCAD085-E8A6-8845-BD4E-CB4CCA059FC4}" type="datetimeFigureOut">
               <a:rPr lang="en-US" smtClean="0"/>
-              <a:t>8/25/2026</a:t>
+              <a:t>8/27/2026</a:t>
             </a:fld>
             <a:endParaRPr lang="en-US"/>
           </a:p>
@@ -3380,13 +3412,13 @@
   <p:clrMapOvr>
     <a:masterClrMapping/>
   </p:clrMapOvr>
-  <mc:AlternateContent xmlns:mc="http://schemas.openxmlformats.org/markup-compatibility/2006">
-    <mc:Choice xmlns:p14="http://schemas.microsoft.com/office/powerpoint/2010/main" Requires="p14">
+  <mc:AlternateContent xmlns:mc="http://schemas.openxmlformats.org/markup-compatibility/2006" xmlns:p14="http://schemas.microsoft.com/office/powerpoint/2010/main">
+    <mc:Choice Requires="p14">
       <p:transition spd="slow" p14:dur="1500">
         <p:split orient="vert"/>
       </p:transition>
     </mc:Choice>
-    <mc:Fallback>
+    <mc:Fallback xmlns="">
       <p:transition spd="slow">
         <p:split orient="vert"/>
       </p:transition>
@@ -6529,7 +6561,7 @@
         </p:nvSpPr>
         <p:spPr>
           <a:xfrm>
-            <a:off x="2985435" y="2044005"/>
+            <a:off x="609601" y="2044005"/>
             <a:ext cx="6221130" cy="2769989"/>
           </a:xfrm>
           <a:prstGeom prst="rect">
@@ -6604,18 +6636,130 @@
           </a:p>
         </p:txBody>
       </p:sp>
+      <p:pic>
+        <p:nvPicPr>
+          <p:cNvPr id="4" name="Picture 3">
+            <a:extLst>
+              <a:ext uri="{FF2B5EF4-FFF2-40B4-BE49-F238E27FC236}">
+                <a16:creationId xmlns:a16="http://schemas.microsoft.com/office/drawing/2014/main" id="{A02EFB75-B9DB-7A1C-1A98-41C6DA2EE079}"/>
+              </a:ext>
+            </a:extLst>
+          </p:cNvPr>
+          <p:cNvPicPr>
+            <a:picLocks noChangeAspect="1"/>
+          </p:cNvPicPr>
+          <p:nvPr/>
+        </p:nvPicPr>
+        <p:blipFill>
+          <a:blip r:embed="rId2"/>
+          <a:stretch>
+            <a:fillRect/>
+          </a:stretch>
+        </p:blipFill>
+        <p:spPr>
+          <a:xfrm>
+            <a:off x="8553449" y="1469824"/>
+            <a:ext cx="2857500" cy="2857500"/>
+          </a:xfrm>
+          <a:prstGeom prst="rect">
+            <a:avLst/>
+          </a:prstGeom>
+        </p:spPr>
+      </p:pic>
+      <p:cxnSp>
+        <p:nvCxnSpPr>
+          <p:cNvPr id="6" name="Straight Connector 5">
+            <a:extLst>
+              <a:ext uri="{FF2B5EF4-FFF2-40B4-BE49-F238E27FC236}">
+                <a16:creationId xmlns:a16="http://schemas.microsoft.com/office/drawing/2014/main" id="{0C785CD7-AE2F-8A66-BD0B-DF22B86B016B}"/>
+              </a:ext>
+            </a:extLst>
+          </p:cNvPr>
+          <p:cNvCxnSpPr>
+            <a:cxnSpLocks/>
+          </p:cNvCxnSpPr>
+          <p:nvPr/>
+        </p:nvCxnSpPr>
+        <p:spPr>
+          <a:xfrm>
+            <a:off x="7572376" y="827781"/>
+            <a:ext cx="0" cy="5114925"/>
+          </a:xfrm>
+          <a:prstGeom prst="line">
+            <a:avLst/>
+          </a:prstGeom>
+          <a:ln>
+            <a:solidFill>
+              <a:srgbClr val="00B0F0"/>
+            </a:solidFill>
+          </a:ln>
+        </p:spPr>
+        <p:style>
+          <a:lnRef idx="3">
+            <a:schemeClr val="accent2"/>
+          </a:lnRef>
+          <a:fillRef idx="0">
+            <a:schemeClr val="accent2"/>
+          </a:fillRef>
+          <a:effectRef idx="2">
+            <a:schemeClr val="accent2"/>
+          </a:effectRef>
+          <a:fontRef idx="minor">
+            <a:schemeClr val="tx1"/>
+          </a:fontRef>
+        </p:style>
+      </p:cxnSp>
+      <p:sp>
+        <p:nvSpPr>
+          <p:cNvPr id="10" name="TextBox 9">
+            <a:extLst>
+              <a:ext uri="{FF2B5EF4-FFF2-40B4-BE49-F238E27FC236}">
+                <a16:creationId xmlns:a16="http://schemas.microsoft.com/office/drawing/2014/main" id="{DE78C1BE-8D7F-9CBE-3850-E55228E8B55A}"/>
+              </a:ext>
+            </a:extLst>
+          </p:cNvPr>
+          <p:cNvSpPr txBox="1"/>
+          <p:nvPr/>
+        </p:nvSpPr>
+        <p:spPr>
+          <a:xfrm>
+            <a:off x="8079787" y="4167663"/>
+            <a:ext cx="3804824" cy="646331"/>
+          </a:xfrm>
+          <a:prstGeom prst="rect">
+            <a:avLst/>
+          </a:prstGeom>
+          <a:noFill/>
+        </p:spPr>
+        <p:txBody>
+          <a:bodyPr wrap="none" rtlCol="0">
+            <a:spAutoFit/>
+          </a:bodyPr>
+          <a:lstStyle/>
+          <a:p>
+            <a:r>
+              <a:rPr lang="en-US" sz="3600" dirty="0">
+                <a:solidFill>
+                  <a:srgbClr val="00B0F0"/>
+                </a:solidFill>
+              </a:rPr>
+              <a:t>Scan to Try the App</a:t>
+            </a:r>
+          </a:p>
+        </p:txBody>
+      </p:sp>
     </p:spTree>
   </p:cSld>
   <p:clrMapOvr>
     <a:masterClrMapping/>
   </p:clrMapOvr>
-  <mc:AlternateContent xmlns:mc="http://schemas.openxmlformats.org/markup-compatibility/2006">
-    <mc:Choice xmlns:p14="http://schemas.microsoft.com/office/powerpoint/2010/main" Requires="p14">
+  <mc:AlternateContent xmlns:mc="http://schemas.openxmlformats.org/markup-compatibility/2006" xmlns:p14="http://schemas.microsoft.com/office/powerpoint/2010/main">
+    <mc:Choice Requires="p14">
       <p:transition spd="slow" p14:dur="800">
         <p:circle/>
       </p:transition>
     </mc:Choice>
-    <mc:Fallback>
+    <mc:Fallback xmlns="">
       <p:transition spd="slow">
         <p:circle/>
       </p:transition>

--- a/Predictive_Maintenance_Presentation.pptx
+++ b/Predictive_Maintenance_Presentation.pptx
@@ -17,15 +17,16 @@
     <p:sldId id="265" r:id="rId11"/>
     <p:sldId id="266" r:id="rId12"/>
     <p:sldId id="267" r:id="rId13"/>
-    <p:sldId id="268" r:id="rId14"/>
-    <p:sldId id="269" r:id="rId15"/>
-    <p:sldId id="270" r:id="rId16"/>
-    <p:sldId id="271" r:id="rId17"/>
-    <p:sldId id="272" r:id="rId18"/>
-    <p:sldId id="273" r:id="rId19"/>
-    <p:sldId id="274" r:id="rId20"/>
-    <p:sldId id="275" r:id="rId21"/>
-    <p:sldId id="276" r:id="rId22"/>
+    <p:sldId id="277" r:id="rId14"/>
+    <p:sldId id="268" r:id="rId15"/>
+    <p:sldId id="269" r:id="rId16"/>
+    <p:sldId id="270" r:id="rId17"/>
+    <p:sldId id="271" r:id="rId18"/>
+    <p:sldId id="272" r:id="rId19"/>
+    <p:sldId id="273" r:id="rId20"/>
+    <p:sldId id="274" r:id="rId21"/>
+    <p:sldId id="275" r:id="rId22"/>
+    <p:sldId id="276" r:id="rId23"/>
   </p:sldIdLst>
   <p:sldSz cx="12192000" cy="6858000"/>
   <p:notesSz cx="6858000" cy="9144000"/>
@@ -147,8 +148,8 @@
 <pc:chgInfo xmlns:a="http://schemas.openxmlformats.org/drawingml/2006/main" xmlns:r="http://schemas.openxmlformats.org/officeDocument/2006/relationships" xmlns:ac="http://schemas.microsoft.com/office/drawing/2013/main/command" xmlns:pc="http://schemas.microsoft.com/office/powerpoint/2013/main/command">
   <pc:docChgLst>
     <pc:chgData name="محمد رضا مصطفى علي" userId="c6ea1ee86786e35d" providerId="LiveId" clId="{471EB1E5-A5B5-4169-BAFF-97E1977EEA39}"/>
-    <pc:docChg chg="undo custSel modSld">
-      <pc:chgData name="محمد رضا مصطفى علي" userId="c6ea1ee86786e35d" providerId="LiveId" clId="{471EB1E5-A5B5-4169-BAFF-97E1977EEA39}" dt="2026-08-26T23:51:52.466" v="76" actId="1076"/>
+    <pc:docChg chg="undo custSel addSld modSld">
+      <pc:chgData name="محمد رضا مصطفى علي" userId="c6ea1ee86786e35d" providerId="LiveId" clId="{471EB1E5-A5B5-4169-BAFF-97E1977EEA39}" dt="2026-08-27T11:32:50.128" v="177" actId="20577"/>
       <pc:docMkLst>
         <pc:docMk/>
       </pc:docMkLst>
@@ -230,19 +231,43 @@
           <pc:sldMk cId="0" sldId="265"/>
         </pc:sldMkLst>
       </pc:sldChg>
-      <pc:sldChg chg="modTransition">
-        <pc:chgData name="محمد رضا مصطفى علي" userId="c6ea1ee86786e35d" providerId="LiveId" clId="{471EB1E5-A5B5-4169-BAFF-97E1977EEA39}" dt="2026-08-25T01:35:32.866" v="40"/>
+      <pc:sldChg chg="modSp mod modTransition">
+        <pc:chgData name="محمد رضا مصطفى علي" userId="c6ea1ee86786e35d" providerId="LiveId" clId="{471EB1E5-A5B5-4169-BAFF-97E1977EEA39}" dt="2026-08-27T11:20:24.808" v="104" actId="6549"/>
         <pc:sldMkLst>
           <pc:docMk/>
           <pc:sldMk cId="0" sldId="266"/>
         </pc:sldMkLst>
+        <pc:spChg chg="mod">
+          <ac:chgData name="محمد رضا مصطفى علي" userId="c6ea1ee86786e35d" providerId="LiveId" clId="{471EB1E5-A5B5-4169-BAFF-97E1977EEA39}" dt="2026-08-27T11:20:24.808" v="104" actId="6549"/>
+          <ac:spMkLst>
+            <pc:docMk/>
+            <pc:sldMk cId="0" sldId="266"/>
+            <ac:spMk id="3" creationId="{00000000-0000-0000-0000-000000000000}"/>
+          </ac:spMkLst>
+        </pc:spChg>
       </pc:sldChg>
-      <pc:sldChg chg="modTransition">
-        <pc:chgData name="محمد رضا مصطفى علي" userId="c6ea1ee86786e35d" providerId="LiveId" clId="{471EB1E5-A5B5-4169-BAFF-97E1977EEA39}" dt="2026-08-25T01:35:39.202" v="41"/>
+      <pc:sldChg chg="modSp mod modTransition">
+        <pc:chgData name="محمد رضا مصطفى علي" userId="c6ea1ee86786e35d" providerId="LiveId" clId="{471EB1E5-A5B5-4169-BAFF-97E1977EEA39}" dt="2026-08-27T11:32:50.128" v="177" actId="20577"/>
         <pc:sldMkLst>
           <pc:docMk/>
           <pc:sldMk cId="0" sldId="267"/>
         </pc:sldMkLst>
+        <pc:spChg chg="mod">
+          <ac:chgData name="محمد رضا مصطفى علي" userId="c6ea1ee86786e35d" providerId="LiveId" clId="{471EB1E5-A5B5-4169-BAFF-97E1977EEA39}" dt="2026-08-27T11:32:50.128" v="177" actId="20577"/>
+          <ac:spMkLst>
+            <pc:docMk/>
+            <pc:sldMk cId="0" sldId="267"/>
+            <ac:spMk id="3" creationId="{00000000-0000-0000-0000-000000000000}"/>
+          </ac:spMkLst>
+        </pc:spChg>
+        <pc:graphicFrameChg chg="mod modGraphic">
+          <ac:chgData name="محمد رضا مصطفى علي" userId="c6ea1ee86786e35d" providerId="LiveId" clId="{471EB1E5-A5B5-4169-BAFF-97E1977EEA39}" dt="2026-08-27T10:58:42.013" v="102"/>
+          <ac:graphicFrameMkLst>
+            <pc:docMk/>
+            <pc:sldMk cId="0" sldId="267"/>
+            <ac:graphicFrameMk id="4" creationId="{00000000-0000-0000-0000-000000000000}"/>
+          </ac:graphicFrameMkLst>
+        </pc:graphicFrameChg>
       </pc:sldChg>
       <pc:sldChg chg="modTransition">
         <pc:chgData name="محمد رضا مصطفى علي" userId="c6ea1ee86786e35d" providerId="LiveId" clId="{471EB1E5-A5B5-4169-BAFF-97E1977EEA39}" dt="2026-08-25T01:35:43.218" v="42"/>
@@ -362,6 +387,29 @@
             <ac:cxnSpMk id="6" creationId="{0C785CD7-AE2F-8A66-BD0B-DF22B86B016B}"/>
           </ac:cxnSpMkLst>
         </pc:cxnChg>
+      </pc:sldChg>
+      <pc:sldChg chg="modSp add mod">
+        <pc:chgData name="محمد رضا مصطفى علي" userId="c6ea1ee86786e35d" providerId="LiveId" clId="{471EB1E5-A5B5-4169-BAFF-97E1977EEA39}" dt="2026-08-27T11:32:37.215" v="170" actId="20577"/>
+        <pc:sldMkLst>
+          <pc:docMk/>
+          <pc:sldMk cId="3646328999" sldId="277"/>
+        </pc:sldMkLst>
+        <pc:spChg chg="mod">
+          <ac:chgData name="محمد رضا مصطفى علي" userId="c6ea1ee86786e35d" providerId="LiveId" clId="{471EB1E5-A5B5-4169-BAFF-97E1977EEA39}" dt="2026-08-27T11:32:37.215" v="170" actId="20577"/>
+          <ac:spMkLst>
+            <pc:docMk/>
+            <pc:sldMk cId="3646328999" sldId="277"/>
+            <ac:spMk id="3" creationId="{A2BDF034-9B51-D71F-064C-18BAED24C4CF}"/>
+          </ac:spMkLst>
+        </pc:spChg>
+        <pc:graphicFrameChg chg="mod modGraphic">
+          <ac:chgData name="محمد رضا مصطفى علي" userId="c6ea1ee86786e35d" providerId="LiveId" clId="{471EB1E5-A5B5-4169-BAFF-97E1977EEA39}" dt="2026-08-27T11:25:21.063" v="163"/>
+          <ac:graphicFrameMkLst>
+            <pc:docMk/>
+            <pc:sldMk cId="3646328999" sldId="277"/>
+            <ac:graphicFrameMk id="4" creationId="{52B5D41C-C7CC-1399-F69C-E2AA7BEE91FE}"/>
+          </ac:graphicFrameMkLst>
+        </pc:graphicFrameChg>
       </pc:sldChg>
     </pc:docChg>
   </pc:docChgLst>
@@ -3757,8 +3805,8 @@
         </p:nvSpPr>
         <p:spPr>
           <a:xfrm>
-            <a:off x="457200" y="731520"/>
-            <a:ext cx="10972800" cy="914400"/>
+            <a:off x="336885" y="731520"/>
+            <a:ext cx="4673074" cy="923330"/>
           </a:xfrm>
           <a:prstGeom prst="rect">
             <a:avLst/>
@@ -3771,7 +3819,7 @@
           </a:bodyPr>
           <a:lstStyle/>
           <a:p>
-            <a:endParaRPr/>
+            <a:endParaRPr dirty="0"/>
           </a:p>
           <a:p>
             <a:pPr>
@@ -3783,7 +3831,8 @@
               </a:defRPr>
             </a:pPr>
             <a:r>
-              <a:t>Rigorous Evaluation via GridSearchCV</a:t>
+              <a:rPr dirty="0"/>
+              <a:t>Rigorous Evaluation</a:t>
             </a:r>
           </a:p>
         </p:txBody>
@@ -3810,7 +3859,7 @@
           </a:bodyPr>
           <a:lstStyle/>
           <a:p>
-            <a:endParaRPr/>
+            <a:endParaRPr dirty="0"/>
           </a:p>
           <a:p>
             <a:pPr>
@@ -3822,34 +3871,62 @@
               </a:defRPr>
             </a:pPr>
             <a:r>
+              <a:rPr dirty="0"/>
               <a:t>Models Evaluated (5-fold CV):</a:t>
             </a:r>
-            <a:br/>
-            <a:br/>
-            <a:r>
+            <a:br>
+              <a:rPr dirty="0"/>
+            </a:br>
+            <a:br>
+              <a:rPr dirty="0"/>
+            </a:br>
+            <a:r>
+              <a:rPr dirty="0"/>
               <a:t>1. Logistic Regression</a:t>
             </a:r>
-            <a:br/>
-            <a:r>
+            <a:br>
+              <a:rPr dirty="0"/>
+            </a:br>
+            <a:r>
+              <a:rPr dirty="0"/>
               <a:t>2. Decision Tree</a:t>
             </a:r>
-            <a:br/>
-            <a:r>
+            <a:br>
+              <a:rPr dirty="0"/>
+            </a:br>
+            <a:r>
+              <a:rPr dirty="0"/>
               <a:t>3. Random Forest</a:t>
             </a:r>
-            <a:br/>
-            <a:r>
+            <a:br>
+              <a:rPr dirty="0"/>
+            </a:br>
+            <a:r>
+              <a:rPr dirty="0"/>
               <a:t>4. Support Vector Machine (SVM)</a:t>
             </a:r>
-            <a:br/>
-            <a:r>
+            <a:br>
+              <a:rPr dirty="0"/>
+            </a:br>
+            <a:r>
+              <a:rPr dirty="0"/>
               <a:t>5. K-Nearest Neighbors (KNN)</a:t>
             </a:r>
-            <a:br/>
-            <a:br/>
-            <a:r>
-              <a:t>🏆 Selected Best Model: XGBoost</a:t>
-            </a:r>
+            <a:br>
+              <a:rPr dirty="0"/>
+            </a:br>
+            <a:br>
+              <a:rPr dirty="0"/>
+            </a:br>
+            <a:r>
+              <a:rPr dirty="0"/>
+              <a:t>🏆 Selected Best Model: </a:t>
+            </a:r>
+            <a:r>
+              <a:rPr dirty="0" err="1"/>
+              <a:t>XGBoost</a:t>
+            </a:r>
+            <a:endParaRPr dirty="0"/>
           </a:p>
         </p:txBody>
       </p:sp>
@@ -3937,7 +4014,7 @@
         <p:spPr>
           <a:xfrm>
             <a:off x="457200" y="731520"/>
-            <a:ext cx="10972800" cy="914400"/>
+            <a:ext cx="10546477" cy="923330"/>
           </a:xfrm>
           <a:prstGeom prst="rect">
             <a:avLst/>
@@ -3950,7 +4027,7 @@
           </a:bodyPr>
           <a:lstStyle/>
           <a:p>
-            <a:endParaRPr/>
+            <a:endParaRPr dirty="0"/>
           </a:p>
           <a:p>
             <a:pPr>
@@ -3962,8 +4039,14 @@
               </a:defRPr>
             </a:pPr>
             <a:r>
+              <a:rPr dirty="0"/>
               <a:t>Model Comparison &amp; Selection</a:t>
             </a:r>
+            <a:r>
+              <a:rPr lang="en-US" dirty="0"/>
+              <a:t> for binary-class</a:t>
+            </a:r>
+            <a:endParaRPr dirty="0"/>
           </a:p>
         </p:txBody>
       </p:sp>
@@ -3973,11 +4056,17 @@
           <p:cNvGraphicFramePr>
             <a:graphicFrameLocks noGrp="1"/>
           </p:cNvGraphicFramePr>
-          <p:nvPr/>
+          <p:nvPr>
+            <p:extLst>
+              <p:ext uri="{D42A27DB-BD31-4B8C-83A1-F6EECF244321}">
+                <p14:modId xmlns:p14="http://schemas.microsoft.com/office/powerpoint/2010/main" val="788553913"/>
+              </p:ext>
+            </p:extLst>
+          </p:nvPr>
         </p:nvGraphicFramePr>
         <p:xfrm>
-          <a:off x="1371600" y="2286000"/>
-          <a:ext cx="9445752" cy="2834640"/>
+          <a:off x="1371600" y="2418348"/>
+          <a:ext cx="9445752" cy="3749040"/>
         </p:xfrm>
         <a:graphic>
           <a:graphicData uri="http://schemas.openxmlformats.org/drawingml/2006/table">
@@ -4333,6 +4422,7 @@
                         </a:defRPr>
                       </a:pPr>
                       <a:r>
+                        <a:rPr dirty="0"/>
                         <a:t>Random Forest</a:t>
                       </a:r>
                     </a:p>
@@ -4478,6 +4568,7 @@
                         </a:defRPr>
                       </a:pPr>
                       <a:r>
+                        <a:rPr dirty="0"/>
                         <a:t>Decision Tree</a:t>
                       </a:r>
                     </a:p>
@@ -4501,6 +4592,7 @@
                         </a:defRPr>
                       </a:pPr>
                       <a:r>
+                        <a:rPr dirty="0"/>
                         <a:t>0.963</a:t>
                       </a:r>
                     </a:p>
@@ -4593,6 +4685,7 @@
                         </a:defRPr>
                       </a:pPr>
                       <a:r>
+                        <a:rPr dirty="0"/>
                         <a:t>0.895</a:t>
                       </a:r>
                     </a:p>
@@ -4623,6 +4716,393 @@
                         </a:defRPr>
                       </a:pPr>
                       <a:r>
+                        <a:rPr lang="en-US" dirty="0"/>
+                        <a:t>SVM</a:t>
+                      </a:r>
+                      <a:endParaRPr dirty="0"/>
+                    </a:p>
+                  </a:txBody>
+                  <a:tcPr>
+                    <a:solidFill>
+                      <a:srgbClr val="05070D"/>
+                    </a:solidFill>
+                  </a:tcPr>
+                </a:tc>
+                <a:tc>
+                  <a:txBody>
+                    <a:bodyPr/>
+                    <a:lstStyle/>
+                    <a:p>
+                      <a:pPr>
+                        <a:defRPr>
+                          <a:solidFill>
+                            <a:srgbClr val="FFFFFF"/>
+                          </a:solidFill>
+                        </a:defRPr>
+                      </a:pPr>
+                      <a:r>
+                        <a:rPr lang="en-US" dirty="0"/>
+                        <a:t>0.925</a:t>
+                      </a:r>
+                      <a:endParaRPr dirty="0"/>
+                    </a:p>
+                  </a:txBody>
+                  <a:tcPr>
+                    <a:solidFill>
+                      <a:srgbClr val="05070D"/>
+                    </a:solidFill>
+                  </a:tcPr>
+                </a:tc>
+                <a:tc>
+                  <a:txBody>
+                    <a:bodyPr/>
+                    <a:lstStyle/>
+                    <a:p>
+                      <a:pPr>
+                        <a:defRPr>
+                          <a:solidFill>
+                            <a:srgbClr val="FFFFFF"/>
+                          </a:solidFill>
+                        </a:defRPr>
+                      </a:pPr>
+                      <a:r>
+                        <a:rPr lang="en-US" sz="1800" b="0" i="0" kern="1200" dirty="0">
+                          <a:solidFill>
+                            <a:srgbClr val="FFFFFF"/>
+                          </a:solidFill>
+                          <a:effectLst/>
+                          <a:latin typeface="+mn-lt"/>
+                          <a:ea typeface="+mn-ea"/>
+                          <a:cs typeface="+mn-cs"/>
+                        </a:rPr>
+                        <a:t>0.302</a:t>
+                      </a:r>
+                      <a:endParaRPr dirty="0"/>
+                    </a:p>
+                  </a:txBody>
+                  <a:tcPr>
+                    <a:solidFill>
+                      <a:srgbClr val="05070D"/>
+                    </a:solidFill>
+                  </a:tcPr>
+                </a:tc>
+                <a:tc>
+                  <a:txBody>
+                    <a:bodyPr/>
+                    <a:lstStyle/>
+                    <a:p>
+                      <a:pPr>
+                        <a:defRPr>
+                          <a:solidFill>
+                            <a:srgbClr val="FFFFFF"/>
+                          </a:solidFill>
+                        </a:defRPr>
+                      </a:pPr>
+                      <a:r>
+                        <a:rPr lang="en-US" sz="1800" b="0" i="0" kern="1200" dirty="0">
+                          <a:solidFill>
+                            <a:srgbClr val="FFFFFF"/>
+                          </a:solidFill>
+                          <a:effectLst/>
+                          <a:latin typeface="+mn-lt"/>
+                          <a:ea typeface="+mn-ea"/>
+                          <a:cs typeface="+mn-cs"/>
+                        </a:rPr>
+                        <a:t>0.926</a:t>
+                      </a:r>
+                      <a:endParaRPr dirty="0"/>
+                    </a:p>
+                  </a:txBody>
+                  <a:tcPr>
+                    <a:solidFill>
+                      <a:srgbClr val="05070D"/>
+                    </a:solidFill>
+                  </a:tcPr>
+                </a:tc>
+                <a:tc>
+                  <a:txBody>
+                    <a:bodyPr/>
+                    <a:lstStyle/>
+                    <a:p>
+                      <a:pPr>
+                        <a:defRPr>
+                          <a:solidFill>
+                            <a:srgbClr val="FFFFFF"/>
+                          </a:solidFill>
+                        </a:defRPr>
+                      </a:pPr>
+                      <a:r>
+                        <a:rPr lang="en-US" sz="1800" b="0" i="0" kern="1200" dirty="0">
+                          <a:solidFill>
+                            <a:srgbClr val="FFFFFF"/>
+                          </a:solidFill>
+                          <a:effectLst/>
+                          <a:latin typeface="+mn-lt"/>
+                          <a:ea typeface="+mn-ea"/>
+                          <a:cs typeface="+mn-cs"/>
+                        </a:rPr>
+                        <a:t>0.456</a:t>
+                      </a:r>
+                      <a:endParaRPr dirty="0"/>
+                    </a:p>
+                  </a:txBody>
+                  <a:tcPr>
+                    <a:solidFill>
+                      <a:srgbClr val="05070D"/>
+                    </a:solidFill>
+                  </a:tcPr>
+                </a:tc>
+                <a:tc>
+                  <a:txBody>
+                    <a:bodyPr/>
+                    <a:lstStyle/>
+                    <a:p>
+                      <a:pPr>
+                        <a:defRPr>
+                          <a:solidFill>
+                            <a:srgbClr val="FFFFFF"/>
+                          </a:solidFill>
+                        </a:defRPr>
+                      </a:pPr>
+                      <a:r>
+                        <a:rPr lang="en-US" sz="1800" b="0" i="0" kern="1200" dirty="0">
+                          <a:solidFill>
+                            <a:srgbClr val="FFFFFF"/>
+                          </a:solidFill>
+                          <a:effectLst/>
+                          <a:latin typeface="+mn-lt"/>
+                          <a:ea typeface="+mn-ea"/>
+                          <a:cs typeface="+mn-cs"/>
+                        </a:rPr>
+                        <a:t>0.975</a:t>
+                      </a:r>
+                      <a:endParaRPr dirty="0"/>
+                    </a:p>
+                  </a:txBody>
+                  <a:tcPr>
+                    <a:solidFill>
+                      <a:srgbClr val="05070D"/>
+                    </a:solidFill>
+                  </a:tcPr>
+                </a:tc>
+                <a:extLst>
+                  <a:ext uri="{0D108BD9-81ED-4DB2-BD59-A6C34878D82A}">
+                    <a16:rowId xmlns:a16="http://schemas.microsoft.com/office/drawing/2014/main" val="1994590469"/>
+                  </a:ext>
+                </a:extLst>
+              </a:tr>
+              <a:tr h="457200">
+                <a:tc>
+                  <a:txBody>
+                    <a:bodyPr/>
+                    <a:lstStyle/>
+                    <a:p>
+                      <a:pPr>
+                        <a:defRPr>
+                          <a:solidFill>
+                            <a:srgbClr val="FFFFFF"/>
+                          </a:solidFill>
+                        </a:defRPr>
+                      </a:pPr>
+                      <a:r>
+                        <a:rPr lang="en-US" dirty="0"/>
+                        <a:t>KNN</a:t>
+                      </a:r>
+                      <a:endParaRPr dirty="0"/>
+                    </a:p>
+                  </a:txBody>
+                  <a:tcPr>
+                    <a:solidFill>
+                      <a:srgbClr val="05070D"/>
+                    </a:solidFill>
+                  </a:tcPr>
+                </a:tc>
+                <a:tc>
+                  <a:txBody>
+                    <a:bodyPr/>
+                    <a:lstStyle/>
+                    <a:p>
+                      <a:pPr>
+                        <a:defRPr>
+                          <a:solidFill>
+                            <a:srgbClr val="FFFFFF"/>
+                          </a:solidFill>
+                        </a:defRPr>
+                      </a:pPr>
+                      <a:r>
+                        <a:rPr lang="en-US" sz="1800" b="0" i="0" kern="1200" dirty="0">
+                          <a:solidFill>
+                            <a:srgbClr val="FFFFFF"/>
+                          </a:solidFill>
+                          <a:effectLst/>
+                          <a:latin typeface="+mn-lt"/>
+                          <a:ea typeface="+mn-ea"/>
+                          <a:cs typeface="+mn-cs"/>
+                        </a:rPr>
+                        <a:t>0.937</a:t>
+                      </a:r>
+                      <a:endParaRPr dirty="0"/>
+                    </a:p>
+                  </a:txBody>
+                  <a:tcPr>
+                    <a:solidFill>
+                      <a:srgbClr val="05070D"/>
+                    </a:solidFill>
+                  </a:tcPr>
+                </a:tc>
+                <a:tc>
+                  <a:txBody>
+                    <a:bodyPr/>
+                    <a:lstStyle/>
+                    <a:p>
+                      <a:pPr>
+                        <a:defRPr>
+                          <a:solidFill>
+                            <a:srgbClr val="FFFFFF"/>
+                          </a:solidFill>
+                        </a:defRPr>
+                      </a:pPr>
+                      <a:r>
+                        <a:rPr lang="en-US" sz="1800" b="0" i="0" kern="1200" dirty="0">
+                          <a:solidFill>
+                            <a:srgbClr val="FFFFFF"/>
+                          </a:solidFill>
+                          <a:effectLst/>
+                          <a:latin typeface="+mn-lt"/>
+                          <a:ea typeface="+mn-ea"/>
+                          <a:cs typeface="+mn-cs"/>
+                        </a:rPr>
+                        <a:t>0.320</a:t>
+                      </a:r>
+                      <a:endParaRPr dirty="0"/>
+                    </a:p>
+                  </a:txBody>
+                  <a:tcPr>
+                    <a:solidFill>
+                      <a:srgbClr val="05070D"/>
+                    </a:solidFill>
+                  </a:tcPr>
+                </a:tc>
+                <a:tc>
+                  <a:txBody>
+                    <a:bodyPr/>
+                    <a:lstStyle/>
+                    <a:p>
+                      <a:pPr>
+                        <a:defRPr>
+                          <a:solidFill>
+                            <a:srgbClr val="FFFFFF"/>
+                          </a:solidFill>
+                        </a:defRPr>
+                      </a:pPr>
+                      <a:r>
+                        <a:rPr lang="en-US" sz="1800" b="0" i="0" kern="1200" dirty="0">
+                          <a:solidFill>
+                            <a:srgbClr val="FFFFFF"/>
+                          </a:solidFill>
+                          <a:effectLst/>
+                          <a:latin typeface="+mn-lt"/>
+                          <a:ea typeface="+mn-ea"/>
+                          <a:cs typeface="+mn-cs"/>
+                        </a:rPr>
+                        <a:t>0.750</a:t>
+                      </a:r>
+                      <a:endParaRPr dirty="0"/>
+                    </a:p>
+                  </a:txBody>
+                  <a:tcPr>
+                    <a:solidFill>
+                      <a:srgbClr val="05070D"/>
+                    </a:solidFill>
+                  </a:tcPr>
+                </a:tc>
+                <a:tc>
+                  <a:txBody>
+                    <a:bodyPr/>
+                    <a:lstStyle/>
+                    <a:p>
+                      <a:pPr>
+                        <a:defRPr>
+                          <a:solidFill>
+                            <a:srgbClr val="FFFFFF"/>
+                          </a:solidFill>
+                        </a:defRPr>
+                      </a:pPr>
+                      <a:r>
+                        <a:rPr lang="en-US" sz="1800" b="0" i="0" kern="1200" dirty="0">
+                          <a:solidFill>
+                            <a:srgbClr val="FFFFFF"/>
+                          </a:solidFill>
+                          <a:effectLst/>
+                          <a:latin typeface="+mn-lt"/>
+                          <a:ea typeface="+mn-ea"/>
+                          <a:cs typeface="+mn-cs"/>
+                        </a:rPr>
+                        <a:t>0.449</a:t>
+                      </a:r>
+                      <a:endParaRPr dirty="0"/>
+                    </a:p>
+                  </a:txBody>
+                  <a:tcPr>
+                    <a:solidFill>
+                      <a:srgbClr val="05070D"/>
+                    </a:solidFill>
+                  </a:tcPr>
+                </a:tc>
+                <a:tc>
+                  <a:txBody>
+                    <a:bodyPr/>
+                    <a:lstStyle/>
+                    <a:p>
+                      <a:pPr>
+                        <a:defRPr>
+                          <a:solidFill>
+                            <a:srgbClr val="FFFFFF"/>
+                          </a:solidFill>
+                        </a:defRPr>
+                      </a:pPr>
+                      <a:r>
+                        <a:rPr lang="en-US" sz="1800" b="0" i="0" kern="1200" dirty="0">
+                          <a:solidFill>
+                            <a:srgbClr val="FFFFFF"/>
+                          </a:solidFill>
+                          <a:effectLst/>
+                          <a:latin typeface="+mn-lt"/>
+                          <a:ea typeface="+mn-ea"/>
+                          <a:cs typeface="+mn-cs"/>
+                        </a:rPr>
+                        <a:t>0.896</a:t>
+                      </a:r>
+                      <a:endParaRPr dirty="0"/>
+                    </a:p>
+                  </a:txBody>
+                  <a:tcPr>
+                    <a:solidFill>
+                      <a:srgbClr val="05070D"/>
+                    </a:solidFill>
+                  </a:tcPr>
+                </a:tc>
+                <a:extLst>
+                  <a:ext uri="{0D108BD9-81ED-4DB2-BD59-A6C34878D82A}">
+                    <a16:rowId xmlns:a16="http://schemas.microsoft.com/office/drawing/2014/main" val="719580962"/>
+                  </a:ext>
+                </a:extLst>
+              </a:tr>
+              <a:tr h="457200">
+                <a:tc>
+                  <a:txBody>
+                    <a:bodyPr/>
+                    <a:lstStyle/>
+                    <a:p>
+                      <a:pPr>
+                        <a:defRPr>
+                          <a:solidFill>
+                            <a:srgbClr val="FFFFFF"/>
+                          </a:solidFill>
+                        </a:defRPr>
+                      </a:pPr>
+                      <a:r>
+                        <a:rPr dirty="0"/>
                         <a:t>Logistic Regression</a:t>
                       </a:r>
                     </a:p>
@@ -4646,6 +5126,7 @@
                         </a:defRPr>
                       </a:pPr>
                       <a:r>
+                        <a:rPr dirty="0"/>
                         <a:t>0.866</a:t>
                       </a:r>
                     </a:p>
@@ -4692,6 +5173,7 @@
                         </a:defRPr>
                       </a:pPr>
                       <a:r>
+                        <a:rPr dirty="0"/>
                         <a:t>0.882</a:t>
                       </a:r>
                     </a:p>
@@ -4738,6 +5220,7 @@
                         </a:defRPr>
                       </a:pPr>
                       <a:r>
+                        <a:rPr dirty="0"/>
                         <a:t>0.934</a:t>
                       </a:r>
                     </a:p>
@@ -4782,7 +5265,13 @@
     </p:bg>
     <p:spTree>
       <p:nvGrpSpPr>
-        <p:cNvPr id="1" name=""/>
+        <p:cNvPr id="1" name="">
+          <a:extLst>
+            <a:ext uri="{FF2B5EF4-FFF2-40B4-BE49-F238E27FC236}">
+              <a16:creationId xmlns:a16="http://schemas.microsoft.com/office/drawing/2014/main" id="{5B55F1EA-490A-1F11-AB5C-7B89A4A62BEF}"/>
+            </a:ext>
+          </a:extLst>
+        </p:cNvPr>
         <p:cNvGrpSpPr/>
         <p:nvPr/>
       </p:nvGrpSpPr>
@@ -4796,7 +5285,13 @@
       </p:grpSpPr>
       <p:sp>
         <p:nvSpPr>
-          <p:cNvPr id="2" name="TextBox 1"/>
+          <p:cNvPr id="2" name="TextBox 1">
+            <a:extLst>
+              <a:ext uri="{FF2B5EF4-FFF2-40B4-BE49-F238E27FC236}">
+                <a16:creationId xmlns:a16="http://schemas.microsoft.com/office/drawing/2014/main" id="{0D3144E9-F5BD-1250-B8E3-927FD44B1954}"/>
+              </a:ext>
+            </a:extLst>
+          </p:cNvPr>
           <p:cNvSpPr txBox="1"/>
           <p:nvPr/>
         </p:nvSpPr>
@@ -4828,21 +5323,27 @@
               </a:defRPr>
             </a:pPr>
             <a:r>
-              <a:t>13 / METRICS</a:t>
-            </a:r>
-          </a:p>
-        </p:txBody>
-      </p:sp>
-      <p:sp>
-        <p:nvSpPr>
-          <p:cNvPr id="3" name="TextBox 2"/>
+              <a:t>12 / RESULTS</a:t>
+            </a:r>
+          </a:p>
+        </p:txBody>
+      </p:sp>
+      <p:sp>
+        <p:nvSpPr>
+          <p:cNvPr id="3" name="TextBox 2">
+            <a:extLst>
+              <a:ext uri="{FF2B5EF4-FFF2-40B4-BE49-F238E27FC236}">
+                <a16:creationId xmlns:a16="http://schemas.microsoft.com/office/drawing/2014/main" id="{A2BDF034-9B51-D71F-064C-18BAED24C4CF}"/>
+              </a:ext>
+            </a:extLst>
+          </p:cNvPr>
           <p:cNvSpPr txBox="1"/>
           <p:nvPr/>
         </p:nvSpPr>
         <p:spPr>
           <a:xfrm>
             <a:off x="457200" y="731520"/>
-            <a:ext cx="10972800" cy="914400"/>
+            <a:ext cx="10264348" cy="923330"/>
           </a:xfrm>
           <a:prstGeom prst="rect">
             <a:avLst/>
@@ -4855,7 +5356,7 @@
           </a:bodyPr>
           <a:lstStyle/>
           <a:p>
-            <a:endParaRPr/>
+            <a:endParaRPr dirty="0"/>
           </a:p>
           <a:p>
             <a:pPr>
@@ -4867,156 +5368,1195 @@
               </a:defRPr>
             </a:pPr>
             <a:r>
-              <a:t>The Business Objective: Maximizing Recall</a:t>
-            </a:r>
-          </a:p>
-        </p:txBody>
-      </p:sp>
-      <p:sp>
-        <p:nvSpPr>
-          <p:cNvPr id="4" name="Rounded Rectangle 3"/>
-          <p:cNvSpPr/>
-          <p:nvPr/>
-        </p:nvSpPr>
-        <p:spPr>
-          <a:xfrm>
-            <a:off x="1828800" y="2286000"/>
-            <a:ext cx="8531352" cy="1828800"/>
-          </a:xfrm>
-          <a:prstGeom prst="roundRect">
-            <a:avLst/>
-          </a:prstGeom>
-          <a:solidFill>
-            <a:srgbClr val="05070D"/>
-          </a:solidFill>
-          <a:ln w="25400">
-            <a:solidFill>
-              <a:srgbClr val="1C2735"/>
-            </a:solidFill>
-          </a:ln>
-        </p:spPr>
-        <p:style>
-          <a:lnRef idx="1">
-            <a:schemeClr val="accent1"/>
-          </a:lnRef>
-          <a:fillRef idx="3">
-            <a:schemeClr val="accent1"/>
-          </a:fillRef>
-          <a:effectRef idx="2">
-            <a:schemeClr val="accent1"/>
-          </a:effectRef>
-          <a:fontRef idx="minor">
-            <a:schemeClr val="lt1"/>
-          </a:fontRef>
-        </p:style>
-        <p:txBody>
-          <a:bodyPr wrap="square" rtlCol="0" anchor="ctr"/>
-          <a:lstStyle/>
-          <a:p>
-            <a:pPr algn="ctr"/>
-            <a:endParaRPr/>
-          </a:p>
-          <a:p>
-            <a:pPr algn="ctr">
-              <a:defRPr sz="2000" b="1">
-                <a:solidFill>
-                  <a:srgbClr val="F2B06D"/>
-                </a:solidFill>
-              </a:defRPr>
-            </a:pPr>
-            <a:r>
-              <a:t>False Negative = Disasters</a:t>
-            </a:r>
-            <a:br/>
-            <a:endParaRPr/>
-          </a:p>
-          <a:p>
-            <a:pPr algn="ctr">
-              <a:defRPr sz="1400">
-                <a:solidFill>
-                  <a:srgbClr val="FFFFFF"/>
-                </a:solidFill>
-              </a:defRPr>
-            </a:pPr>
-            <a:r>
-              <a:t>Predicting 'Safe' when the machine is actually failing results in catastrophic breakdown and halts production.</a:t>
-            </a:r>
-          </a:p>
-        </p:txBody>
-      </p:sp>
-      <p:sp>
-        <p:nvSpPr>
-          <p:cNvPr id="5" name="Rounded Rectangle 4"/>
-          <p:cNvSpPr/>
-          <p:nvPr/>
-        </p:nvSpPr>
-        <p:spPr>
-          <a:xfrm>
-            <a:off x="1828800" y="4389120"/>
-            <a:ext cx="8531352" cy="1828800"/>
-          </a:xfrm>
-          <a:prstGeom prst="roundRect">
-            <a:avLst/>
-          </a:prstGeom>
-          <a:solidFill>
-            <a:srgbClr val="05070D"/>
-          </a:solidFill>
-          <a:ln w="25400">
-            <a:solidFill>
-              <a:srgbClr val="1C2735"/>
-            </a:solidFill>
-          </a:ln>
-        </p:spPr>
-        <p:style>
-          <a:lnRef idx="1">
-            <a:schemeClr val="accent1"/>
-          </a:lnRef>
-          <a:fillRef idx="3">
-            <a:schemeClr val="accent1"/>
-          </a:fillRef>
-          <a:effectRef idx="2">
-            <a:schemeClr val="accent1"/>
-          </a:effectRef>
-          <a:fontRef idx="minor">
-            <a:schemeClr val="lt1"/>
-          </a:fontRef>
-        </p:style>
-        <p:txBody>
-          <a:bodyPr wrap="square" rtlCol="0" anchor="ctr"/>
-          <a:lstStyle/>
-          <a:p>
-            <a:pPr algn="ctr"/>
-            <a:endParaRPr/>
-          </a:p>
-          <a:p>
-            <a:pPr algn="ctr">
-              <a:defRPr sz="2000" b="1">
-                <a:solidFill>
-                  <a:srgbClr val="8A97A8"/>
-                </a:solidFill>
-              </a:defRPr>
-            </a:pPr>
-            <a:r>
-              <a:t>False Positive = Minor Cost</a:t>
-            </a:r>
-            <a:br/>
-            <a:endParaRPr/>
-          </a:p>
-          <a:p>
-            <a:pPr algn="ctr">
-              <a:defRPr sz="1400">
-                <a:solidFill>
-                  <a:srgbClr val="FFFFFF"/>
-                </a:solidFill>
-              </a:defRPr>
-            </a:pPr>
-            <a:r>
-              <a:t>Predicting 'Failure' when it is safe only requires a brief routine inspection.</a:t>
-            </a:r>
-          </a:p>
-        </p:txBody>
-      </p:sp>
+              <a:rPr dirty="0"/>
+              <a:t>Model Comparison &amp; Selection</a:t>
+            </a:r>
+            <a:r>
+              <a:rPr lang="en-US" dirty="0"/>
+              <a:t> for multi-class</a:t>
+            </a:r>
+            <a:endParaRPr dirty="0"/>
+          </a:p>
+        </p:txBody>
+      </p:sp>
+      <p:graphicFrame>
+        <p:nvGraphicFramePr>
+          <p:cNvPr id="4" name="Table 3">
+            <a:extLst>
+              <a:ext uri="{FF2B5EF4-FFF2-40B4-BE49-F238E27FC236}">
+                <a16:creationId xmlns:a16="http://schemas.microsoft.com/office/drawing/2014/main" id="{52B5D41C-C7CC-1399-F69C-E2AA7BEE91FE}"/>
+              </a:ext>
+            </a:extLst>
+          </p:cNvPr>
+          <p:cNvGraphicFramePr>
+            <a:graphicFrameLocks noGrp="1"/>
+          </p:cNvGraphicFramePr>
+          <p:nvPr>
+            <p:extLst>
+              <p:ext uri="{D42A27DB-BD31-4B8C-83A1-F6EECF244321}">
+                <p14:modId xmlns:p14="http://schemas.microsoft.com/office/powerpoint/2010/main" val="1452962665"/>
+              </p:ext>
+            </p:extLst>
+          </p:nvPr>
+        </p:nvGraphicFramePr>
+        <p:xfrm>
+          <a:off x="1371600" y="2418348"/>
+          <a:ext cx="7871460" cy="3749040"/>
+        </p:xfrm>
+        <a:graphic>
+          <a:graphicData uri="http://schemas.openxmlformats.org/drawingml/2006/table">
+            <a:tbl>
+              <a:tblPr firstRow="1" bandRow="1">
+                <a:tableStyleId>{5C22544A-7EE6-4342-B048-85BDC9FD1C3A}</a:tableStyleId>
+              </a:tblPr>
+              <a:tblGrid>
+                <a:gridCol w="1574292">
+                  <a:extLst>
+                    <a:ext uri="{9D8B030D-6E8A-4147-A177-3AD203B41FA5}">
+                      <a16:colId xmlns:a16="http://schemas.microsoft.com/office/drawing/2014/main" val="20000"/>
+                    </a:ext>
+                  </a:extLst>
+                </a:gridCol>
+                <a:gridCol w="1574292">
+                  <a:extLst>
+                    <a:ext uri="{9D8B030D-6E8A-4147-A177-3AD203B41FA5}">
+                      <a16:colId xmlns:a16="http://schemas.microsoft.com/office/drawing/2014/main" val="20001"/>
+                    </a:ext>
+                  </a:extLst>
+                </a:gridCol>
+                <a:gridCol w="1574292">
+                  <a:extLst>
+                    <a:ext uri="{9D8B030D-6E8A-4147-A177-3AD203B41FA5}">
+                      <a16:colId xmlns:a16="http://schemas.microsoft.com/office/drawing/2014/main" val="20002"/>
+                    </a:ext>
+                  </a:extLst>
+                </a:gridCol>
+                <a:gridCol w="1574292">
+                  <a:extLst>
+                    <a:ext uri="{9D8B030D-6E8A-4147-A177-3AD203B41FA5}">
+                      <a16:colId xmlns:a16="http://schemas.microsoft.com/office/drawing/2014/main" val="20003"/>
+                    </a:ext>
+                  </a:extLst>
+                </a:gridCol>
+                <a:gridCol w="1574292">
+                  <a:extLst>
+                    <a:ext uri="{9D8B030D-6E8A-4147-A177-3AD203B41FA5}">
+                      <a16:colId xmlns:a16="http://schemas.microsoft.com/office/drawing/2014/main" val="20004"/>
+                    </a:ext>
+                  </a:extLst>
+                </a:gridCol>
+              </a:tblGrid>
+              <a:tr h="457200">
+                <a:tc>
+                  <a:txBody>
+                    <a:bodyPr/>
+                    <a:lstStyle/>
+                    <a:p>
+                      <a:pPr>
+                        <a:defRPr b="1">
+                          <a:solidFill>
+                            <a:srgbClr val="5FD4E8"/>
+                          </a:solidFill>
+                        </a:defRPr>
+                      </a:pPr>
+                      <a:r>
+                        <a:t>Model</a:t>
+                      </a:r>
+                    </a:p>
+                  </a:txBody>
+                  <a:tcPr>
+                    <a:solidFill>
+                      <a:srgbClr val="1C2735"/>
+                    </a:solidFill>
+                  </a:tcPr>
+                </a:tc>
+                <a:tc>
+                  <a:txBody>
+                    <a:bodyPr/>
+                    <a:lstStyle/>
+                    <a:p>
+                      <a:pPr>
+                        <a:defRPr b="1">
+                          <a:solidFill>
+                            <a:srgbClr val="5FD4E8"/>
+                          </a:solidFill>
+                        </a:defRPr>
+                      </a:pPr>
+                      <a:r>
+                        <a:t>Accuracy</a:t>
+                      </a:r>
+                    </a:p>
+                  </a:txBody>
+                  <a:tcPr>
+                    <a:solidFill>
+                      <a:srgbClr val="1C2735"/>
+                    </a:solidFill>
+                  </a:tcPr>
+                </a:tc>
+                <a:tc>
+                  <a:txBody>
+                    <a:bodyPr/>
+                    <a:lstStyle/>
+                    <a:p>
+                      <a:pPr>
+                        <a:defRPr b="1">
+                          <a:solidFill>
+                            <a:srgbClr val="5FD4E8"/>
+                          </a:solidFill>
+                        </a:defRPr>
+                      </a:pPr>
+                      <a:r>
+                        <a:t>Precision</a:t>
+                      </a:r>
+                    </a:p>
+                  </a:txBody>
+                  <a:tcPr>
+                    <a:solidFill>
+                      <a:srgbClr val="1C2735"/>
+                    </a:solidFill>
+                  </a:tcPr>
+                </a:tc>
+                <a:tc>
+                  <a:txBody>
+                    <a:bodyPr/>
+                    <a:lstStyle/>
+                    <a:p>
+                      <a:pPr>
+                        <a:defRPr b="1">
+                          <a:solidFill>
+                            <a:srgbClr val="5FD4E8"/>
+                          </a:solidFill>
+                        </a:defRPr>
+                      </a:pPr>
+                      <a:r>
+                        <a:t>Recall</a:t>
+                      </a:r>
+                    </a:p>
+                  </a:txBody>
+                  <a:tcPr>
+                    <a:solidFill>
+                      <a:srgbClr val="1C2735"/>
+                    </a:solidFill>
+                  </a:tcPr>
+                </a:tc>
+                <a:tc>
+                  <a:txBody>
+                    <a:bodyPr/>
+                    <a:lstStyle/>
+                    <a:p>
+                      <a:pPr>
+                        <a:defRPr b="1">
+                          <a:solidFill>
+                            <a:srgbClr val="5FD4E8"/>
+                          </a:solidFill>
+                        </a:defRPr>
+                      </a:pPr>
+                      <a:r>
+                        <a:t>F1-Score</a:t>
+                      </a:r>
+                    </a:p>
+                  </a:txBody>
+                  <a:tcPr>
+                    <a:solidFill>
+                      <a:srgbClr val="1C2735"/>
+                    </a:solidFill>
+                  </a:tcPr>
+                </a:tc>
+                <a:extLst>
+                  <a:ext uri="{0D108BD9-81ED-4DB2-BD59-A6C34878D82A}">
+                    <a16:rowId xmlns:a16="http://schemas.microsoft.com/office/drawing/2014/main" val="10000"/>
+                  </a:ext>
+                </a:extLst>
+              </a:tr>
+              <a:tr h="457200">
+                <a:tc>
+                  <a:txBody>
+                    <a:bodyPr/>
+                    <a:lstStyle/>
+                    <a:p>
+                      <a:pPr>
+                        <a:defRPr b="1">
+                          <a:solidFill>
+                            <a:srgbClr val="F2B06D"/>
+                          </a:solidFill>
+                        </a:defRPr>
+                      </a:pPr>
+                      <a:r>
+                        <a:t>XGBoost (Selected)</a:t>
+                      </a:r>
+                    </a:p>
+                  </a:txBody>
+                  <a:tcPr>
+                    <a:solidFill>
+                      <a:srgbClr val="05070D"/>
+                    </a:solidFill>
+                  </a:tcPr>
+                </a:tc>
+                <a:tc>
+                  <a:txBody>
+                    <a:bodyPr/>
+                    <a:lstStyle/>
+                    <a:p>
+                      <a:pPr>
+                        <a:defRPr b="1">
+                          <a:solidFill>
+                            <a:srgbClr val="F2B06D"/>
+                          </a:solidFill>
+                        </a:defRPr>
+                      </a:pPr>
+                      <a:r>
+                        <a:rPr lang="en-US" sz="1800" b="0" i="0" kern="1200" dirty="0">
+                          <a:solidFill>
+                            <a:srgbClr val="F2B06D"/>
+                          </a:solidFill>
+                          <a:effectLst/>
+                          <a:latin typeface="+mn-lt"/>
+                          <a:ea typeface="+mn-ea"/>
+                          <a:cs typeface="+mn-cs"/>
+                        </a:rPr>
+                        <a:t>0.978</a:t>
+                      </a:r>
+                      <a:endParaRPr dirty="0"/>
+                    </a:p>
+                  </a:txBody>
+                  <a:tcPr>
+                    <a:solidFill>
+                      <a:srgbClr val="05070D"/>
+                    </a:solidFill>
+                  </a:tcPr>
+                </a:tc>
+                <a:tc>
+                  <a:txBody>
+                    <a:bodyPr/>
+                    <a:lstStyle/>
+                    <a:p>
+                      <a:pPr>
+                        <a:defRPr b="1">
+                          <a:solidFill>
+                            <a:srgbClr val="F2B06D"/>
+                          </a:solidFill>
+                        </a:defRPr>
+                      </a:pPr>
+                      <a:r>
+                        <a:rPr lang="en-US" sz="1800" b="0" i="0" kern="1200" dirty="0">
+                          <a:solidFill>
+                            <a:srgbClr val="F2B06D"/>
+                          </a:solidFill>
+                          <a:effectLst/>
+                          <a:latin typeface="+mn-lt"/>
+                          <a:ea typeface="+mn-ea"/>
+                          <a:cs typeface="+mn-cs"/>
+                        </a:rPr>
+                        <a:t>0.987</a:t>
+                      </a:r>
+                      <a:endParaRPr dirty="0"/>
+                    </a:p>
+                  </a:txBody>
+                  <a:tcPr>
+                    <a:solidFill>
+                      <a:srgbClr val="05070D"/>
+                    </a:solidFill>
+                  </a:tcPr>
+                </a:tc>
+                <a:tc>
+                  <a:txBody>
+                    <a:bodyPr/>
+                    <a:lstStyle/>
+                    <a:p>
+                      <a:pPr>
+                        <a:defRPr b="1">
+                          <a:solidFill>
+                            <a:srgbClr val="F2B06D"/>
+                          </a:solidFill>
+                        </a:defRPr>
+                      </a:pPr>
+                      <a:r>
+                        <a:rPr lang="en-US" sz="1800" b="0" i="0" kern="1200" dirty="0">
+                          <a:solidFill>
+                            <a:srgbClr val="F2B06D"/>
+                          </a:solidFill>
+                          <a:effectLst/>
+                          <a:latin typeface="+mn-lt"/>
+                          <a:ea typeface="+mn-ea"/>
+                          <a:cs typeface="+mn-cs"/>
+                        </a:rPr>
+                        <a:t>0.978</a:t>
+                      </a:r>
+                      <a:endParaRPr dirty="0"/>
+                    </a:p>
+                  </a:txBody>
+                  <a:tcPr>
+                    <a:solidFill>
+                      <a:srgbClr val="05070D"/>
+                    </a:solidFill>
+                  </a:tcPr>
+                </a:tc>
+                <a:tc>
+                  <a:txBody>
+                    <a:bodyPr/>
+                    <a:lstStyle/>
+                    <a:p>
+                      <a:pPr>
+                        <a:defRPr b="1">
+                          <a:solidFill>
+                            <a:srgbClr val="F2B06D"/>
+                          </a:solidFill>
+                        </a:defRPr>
+                      </a:pPr>
+                      <a:r>
+                        <a:rPr lang="en-US" sz="1800" b="0" i="0" kern="1200" dirty="0">
+                          <a:solidFill>
+                            <a:srgbClr val="F2B06D"/>
+                          </a:solidFill>
+                          <a:effectLst/>
+                          <a:latin typeface="+mn-lt"/>
+                          <a:ea typeface="+mn-ea"/>
+                          <a:cs typeface="+mn-cs"/>
+                        </a:rPr>
+                        <a:t>0.982</a:t>
+                      </a:r>
+                      <a:endParaRPr dirty="0"/>
+                    </a:p>
+                  </a:txBody>
+                  <a:tcPr>
+                    <a:solidFill>
+                      <a:srgbClr val="05070D"/>
+                    </a:solidFill>
+                  </a:tcPr>
+                </a:tc>
+                <a:extLst>
+                  <a:ext uri="{0D108BD9-81ED-4DB2-BD59-A6C34878D82A}">
+                    <a16:rowId xmlns:a16="http://schemas.microsoft.com/office/drawing/2014/main" val="10001"/>
+                  </a:ext>
+                </a:extLst>
+              </a:tr>
+              <a:tr h="457200">
+                <a:tc>
+                  <a:txBody>
+                    <a:bodyPr/>
+                    <a:lstStyle/>
+                    <a:p>
+                      <a:pPr>
+                        <a:defRPr>
+                          <a:solidFill>
+                            <a:srgbClr val="FFFFFF"/>
+                          </a:solidFill>
+                        </a:defRPr>
+                      </a:pPr>
+                      <a:r>
+                        <a:rPr dirty="0"/>
+                        <a:t>Random Forest</a:t>
+                      </a:r>
+                    </a:p>
+                  </a:txBody>
+                  <a:tcPr>
+                    <a:solidFill>
+                      <a:srgbClr val="05070D"/>
+                    </a:solidFill>
+                  </a:tcPr>
+                </a:tc>
+                <a:tc>
+                  <a:txBody>
+                    <a:bodyPr/>
+                    <a:lstStyle/>
+                    <a:p>
+                      <a:pPr>
+                        <a:defRPr>
+                          <a:solidFill>
+                            <a:srgbClr val="FFFFFF"/>
+                          </a:solidFill>
+                        </a:defRPr>
+                      </a:pPr>
+                      <a:r>
+                        <a:rPr lang="en-US" sz="1800" b="0" i="0" kern="1200" dirty="0">
+                          <a:solidFill>
+                            <a:srgbClr val="FFFFFF"/>
+                          </a:solidFill>
+                          <a:effectLst/>
+                          <a:latin typeface="+mn-lt"/>
+                          <a:ea typeface="+mn-ea"/>
+                          <a:cs typeface="+mn-cs"/>
+                        </a:rPr>
+                        <a:t>0.974</a:t>
+                      </a:r>
+                      <a:endParaRPr dirty="0"/>
+                    </a:p>
+                  </a:txBody>
+                  <a:tcPr>
+                    <a:solidFill>
+                      <a:srgbClr val="05070D"/>
+                    </a:solidFill>
+                  </a:tcPr>
+                </a:tc>
+                <a:tc>
+                  <a:txBody>
+                    <a:bodyPr/>
+                    <a:lstStyle/>
+                    <a:p>
+                      <a:pPr>
+                        <a:defRPr>
+                          <a:solidFill>
+                            <a:srgbClr val="FFFFFF"/>
+                          </a:solidFill>
+                        </a:defRPr>
+                      </a:pPr>
+                      <a:r>
+                        <a:rPr lang="en-US" sz="1800" b="0" i="0" kern="1200" dirty="0">
+                          <a:solidFill>
+                            <a:srgbClr val="FFFFFF"/>
+                          </a:solidFill>
+                          <a:effectLst/>
+                          <a:latin typeface="+mn-lt"/>
+                          <a:ea typeface="+mn-ea"/>
+                          <a:cs typeface="+mn-cs"/>
+                        </a:rPr>
+                        <a:t>0.986</a:t>
+                      </a:r>
+                      <a:endParaRPr dirty="0"/>
+                    </a:p>
+                  </a:txBody>
+                  <a:tcPr>
+                    <a:solidFill>
+                      <a:srgbClr val="05070D"/>
+                    </a:solidFill>
+                  </a:tcPr>
+                </a:tc>
+                <a:tc>
+                  <a:txBody>
+                    <a:bodyPr/>
+                    <a:lstStyle/>
+                    <a:p>
+                      <a:pPr>
+                        <a:defRPr>
+                          <a:solidFill>
+                            <a:srgbClr val="FFFFFF"/>
+                          </a:solidFill>
+                        </a:defRPr>
+                      </a:pPr>
+                      <a:r>
+                        <a:rPr lang="en-US" sz="1800" b="0" i="0" kern="1200" dirty="0">
+                          <a:solidFill>
+                            <a:srgbClr val="FFFFFF"/>
+                          </a:solidFill>
+                          <a:effectLst/>
+                          <a:latin typeface="+mn-lt"/>
+                          <a:ea typeface="+mn-ea"/>
+                          <a:cs typeface="+mn-cs"/>
+                        </a:rPr>
+                        <a:t>0.974</a:t>
+                      </a:r>
+                      <a:endParaRPr dirty="0"/>
+                    </a:p>
+                  </a:txBody>
+                  <a:tcPr>
+                    <a:solidFill>
+                      <a:srgbClr val="05070D"/>
+                    </a:solidFill>
+                  </a:tcPr>
+                </a:tc>
+                <a:tc>
+                  <a:txBody>
+                    <a:bodyPr/>
+                    <a:lstStyle/>
+                    <a:p>
+                      <a:pPr>
+                        <a:defRPr>
+                          <a:solidFill>
+                            <a:srgbClr val="FFFFFF"/>
+                          </a:solidFill>
+                        </a:defRPr>
+                      </a:pPr>
+                      <a:r>
+                        <a:rPr lang="en-US" sz="1800" b="0" i="0" kern="1200" dirty="0">
+                          <a:solidFill>
+                            <a:srgbClr val="FFFFFF"/>
+                          </a:solidFill>
+                          <a:effectLst/>
+                          <a:latin typeface="+mn-lt"/>
+                          <a:ea typeface="+mn-ea"/>
+                          <a:cs typeface="+mn-cs"/>
+                        </a:rPr>
+                        <a:t>0.980</a:t>
+                      </a:r>
+                      <a:endParaRPr dirty="0"/>
+                    </a:p>
+                  </a:txBody>
+                  <a:tcPr>
+                    <a:solidFill>
+                      <a:srgbClr val="05070D"/>
+                    </a:solidFill>
+                  </a:tcPr>
+                </a:tc>
+                <a:extLst>
+                  <a:ext uri="{0D108BD9-81ED-4DB2-BD59-A6C34878D82A}">
+                    <a16:rowId xmlns:a16="http://schemas.microsoft.com/office/drawing/2014/main" val="10002"/>
+                  </a:ext>
+                </a:extLst>
+              </a:tr>
+              <a:tr h="457200">
+                <a:tc>
+                  <a:txBody>
+                    <a:bodyPr/>
+                    <a:lstStyle/>
+                    <a:p>
+                      <a:pPr>
+                        <a:defRPr>
+                          <a:solidFill>
+                            <a:srgbClr val="FFFFFF"/>
+                          </a:solidFill>
+                        </a:defRPr>
+                      </a:pPr>
+                      <a:r>
+                        <a:rPr dirty="0"/>
+                        <a:t>Decision Tree</a:t>
+                      </a:r>
+                    </a:p>
+                  </a:txBody>
+                  <a:tcPr>
+                    <a:solidFill>
+                      <a:srgbClr val="05070D"/>
+                    </a:solidFill>
+                  </a:tcPr>
+                </a:tc>
+                <a:tc>
+                  <a:txBody>
+                    <a:bodyPr/>
+                    <a:lstStyle/>
+                    <a:p>
+                      <a:pPr>
+                        <a:defRPr>
+                          <a:solidFill>
+                            <a:srgbClr val="FFFFFF"/>
+                          </a:solidFill>
+                        </a:defRPr>
+                      </a:pPr>
+                      <a:r>
+                        <a:rPr lang="en-US" sz="1800" b="0" i="0" kern="1200" dirty="0">
+                          <a:solidFill>
+                            <a:srgbClr val="FFFFFF"/>
+                          </a:solidFill>
+                          <a:effectLst/>
+                          <a:latin typeface="+mn-lt"/>
+                          <a:ea typeface="+mn-ea"/>
+                          <a:cs typeface="+mn-cs"/>
+                        </a:rPr>
+                        <a:t>0.975</a:t>
+                      </a:r>
+                      <a:endParaRPr dirty="0"/>
+                    </a:p>
+                  </a:txBody>
+                  <a:tcPr>
+                    <a:solidFill>
+                      <a:srgbClr val="05070D"/>
+                    </a:solidFill>
+                  </a:tcPr>
+                </a:tc>
+                <a:tc>
+                  <a:txBody>
+                    <a:bodyPr/>
+                    <a:lstStyle/>
+                    <a:p>
+                      <a:pPr>
+                        <a:defRPr>
+                          <a:solidFill>
+                            <a:srgbClr val="FFFFFF"/>
+                          </a:solidFill>
+                        </a:defRPr>
+                      </a:pPr>
+                      <a:r>
+                        <a:rPr lang="en-US" sz="1800" b="0" i="0" kern="1200" dirty="0">
+                          <a:solidFill>
+                            <a:srgbClr val="FFFFFF"/>
+                          </a:solidFill>
+                          <a:effectLst/>
+                          <a:latin typeface="+mn-lt"/>
+                          <a:ea typeface="+mn-ea"/>
+                          <a:cs typeface="+mn-cs"/>
+                        </a:rPr>
+                        <a:t>0.984</a:t>
+                      </a:r>
+                      <a:endParaRPr dirty="0"/>
+                    </a:p>
+                  </a:txBody>
+                  <a:tcPr>
+                    <a:solidFill>
+                      <a:srgbClr val="05070D"/>
+                    </a:solidFill>
+                  </a:tcPr>
+                </a:tc>
+                <a:tc>
+                  <a:txBody>
+                    <a:bodyPr/>
+                    <a:lstStyle/>
+                    <a:p>
+                      <a:pPr>
+                        <a:defRPr>
+                          <a:solidFill>
+                            <a:srgbClr val="FFFFFF"/>
+                          </a:solidFill>
+                        </a:defRPr>
+                      </a:pPr>
+                      <a:r>
+                        <a:rPr lang="en-US" sz="1800" b="0" i="0" kern="1200" dirty="0">
+                          <a:solidFill>
+                            <a:srgbClr val="FFFFFF"/>
+                          </a:solidFill>
+                          <a:effectLst/>
+                          <a:latin typeface="+mn-lt"/>
+                          <a:ea typeface="+mn-ea"/>
+                          <a:cs typeface="+mn-cs"/>
+                        </a:rPr>
+                        <a:t>0.975</a:t>
+                      </a:r>
+                      <a:endParaRPr dirty="0"/>
+                    </a:p>
+                  </a:txBody>
+                  <a:tcPr>
+                    <a:solidFill>
+                      <a:srgbClr val="05070D"/>
+                    </a:solidFill>
+                  </a:tcPr>
+                </a:tc>
+                <a:tc>
+                  <a:txBody>
+                    <a:bodyPr/>
+                    <a:lstStyle/>
+                    <a:p>
+                      <a:pPr>
+                        <a:defRPr>
+                          <a:solidFill>
+                            <a:srgbClr val="FFFFFF"/>
+                          </a:solidFill>
+                        </a:defRPr>
+                      </a:pPr>
+                      <a:r>
+                        <a:rPr lang="en-US" sz="1800" b="0" i="0" kern="1200" dirty="0">
+                          <a:solidFill>
+                            <a:srgbClr val="FFFFFF"/>
+                          </a:solidFill>
+                          <a:effectLst/>
+                          <a:latin typeface="+mn-lt"/>
+                          <a:ea typeface="+mn-ea"/>
+                          <a:cs typeface="+mn-cs"/>
+                        </a:rPr>
+                        <a:t>0.979</a:t>
+                      </a:r>
+                      <a:endParaRPr dirty="0"/>
+                    </a:p>
+                  </a:txBody>
+                  <a:tcPr>
+                    <a:solidFill>
+                      <a:srgbClr val="05070D"/>
+                    </a:solidFill>
+                  </a:tcPr>
+                </a:tc>
+                <a:extLst>
+                  <a:ext uri="{0D108BD9-81ED-4DB2-BD59-A6C34878D82A}">
+                    <a16:rowId xmlns:a16="http://schemas.microsoft.com/office/drawing/2014/main" val="10003"/>
+                  </a:ext>
+                </a:extLst>
+              </a:tr>
+              <a:tr h="457200">
+                <a:tc>
+                  <a:txBody>
+                    <a:bodyPr/>
+                    <a:lstStyle/>
+                    <a:p>
+                      <a:pPr>
+                        <a:defRPr>
+                          <a:solidFill>
+                            <a:srgbClr val="FFFFFF"/>
+                          </a:solidFill>
+                        </a:defRPr>
+                      </a:pPr>
+                      <a:r>
+                        <a:rPr lang="en-US" dirty="0"/>
+                        <a:t>KNN</a:t>
+                      </a:r>
+                      <a:endParaRPr dirty="0"/>
+                    </a:p>
+                  </a:txBody>
+                  <a:tcPr>
+                    <a:solidFill>
+                      <a:srgbClr val="05070D"/>
+                    </a:solidFill>
+                  </a:tcPr>
+                </a:tc>
+                <a:tc>
+                  <a:txBody>
+                    <a:bodyPr/>
+                    <a:lstStyle/>
+                    <a:p>
+                      <a:pPr>
+                        <a:defRPr>
+                          <a:solidFill>
+                            <a:srgbClr val="FFFFFF"/>
+                          </a:solidFill>
+                        </a:defRPr>
+                      </a:pPr>
+                      <a:r>
+                        <a:rPr lang="en-US" sz="1800" b="0" i="0" kern="1200" dirty="0">
+                          <a:solidFill>
+                            <a:srgbClr val="FFFFFF"/>
+                          </a:solidFill>
+                          <a:effectLst/>
+                          <a:latin typeface="+mn-lt"/>
+                          <a:ea typeface="+mn-ea"/>
+                          <a:cs typeface="+mn-cs"/>
+                        </a:rPr>
+                        <a:t>0.911</a:t>
+                      </a:r>
+                      <a:endParaRPr dirty="0"/>
+                    </a:p>
+                  </a:txBody>
+                  <a:tcPr>
+                    <a:solidFill>
+                      <a:srgbClr val="05070D"/>
+                    </a:solidFill>
+                  </a:tcPr>
+                </a:tc>
+                <a:tc>
+                  <a:txBody>
+                    <a:bodyPr/>
+                    <a:lstStyle/>
+                    <a:p>
+                      <a:pPr>
+                        <a:defRPr>
+                          <a:solidFill>
+                            <a:srgbClr val="FFFFFF"/>
+                          </a:solidFill>
+                        </a:defRPr>
+                      </a:pPr>
+                      <a:r>
+                        <a:rPr lang="en-US" sz="1800" b="0" i="0" kern="1200" dirty="0">
+                          <a:solidFill>
+                            <a:srgbClr val="FFFFFF"/>
+                          </a:solidFill>
+                          <a:effectLst/>
+                          <a:latin typeface="+mn-lt"/>
+                          <a:ea typeface="+mn-ea"/>
+                          <a:cs typeface="+mn-cs"/>
+                        </a:rPr>
+                        <a:t>0.970</a:t>
+                      </a:r>
+                      <a:endParaRPr dirty="0"/>
+                    </a:p>
+                  </a:txBody>
+                  <a:tcPr>
+                    <a:solidFill>
+                      <a:srgbClr val="05070D"/>
+                    </a:solidFill>
+                  </a:tcPr>
+                </a:tc>
+                <a:tc>
+                  <a:txBody>
+                    <a:bodyPr/>
+                    <a:lstStyle/>
+                    <a:p>
+                      <a:pPr>
+                        <a:defRPr>
+                          <a:solidFill>
+                            <a:srgbClr val="FFFFFF"/>
+                          </a:solidFill>
+                        </a:defRPr>
+                      </a:pPr>
+                      <a:r>
+                        <a:rPr lang="en-US" sz="1800" b="0" i="0" kern="1200" dirty="0">
+                          <a:solidFill>
+                            <a:srgbClr val="FFFFFF"/>
+                          </a:solidFill>
+                          <a:effectLst/>
+                          <a:latin typeface="+mn-lt"/>
+                          <a:ea typeface="+mn-ea"/>
+                          <a:cs typeface="+mn-cs"/>
+                        </a:rPr>
+                        <a:t>0.911</a:t>
+                      </a:r>
+                      <a:endParaRPr dirty="0"/>
+                    </a:p>
+                  </a:txBody>
+                  <a:tcPr>
+                    <a:solidFill>
+                      <a:srgbClr val="05070D"/>
+                    </a:solidFill>
+                  </a:tcPr>
+                </a:tc>
+                <a:tc>
+                  <a:txBody>
+                    <a:bodyPr/>
+                    <a:lstStyle/>
+                    <a:p>
+                      <a:pPr>
+                        <a:defRPr>
+                          <a:solidFill>
+                            <a:srgbClr val="FFFFFF"/>
+                          </a:solidFill>
+                        </a:defRPr>
+                      </a:pPr>
+                      <a:r>
+                        <a:rPr lang="en-US" sz="1800" b="0" i="0" kern="1200" dirty="0">
+                          <a:solidFill>
+                            <a:srgbClr val="FFFFFF"/>
+                          </a:solidFill>
+                          <a:effectLst/>
+                          <a:latin typeface="+mn-lt"/>
+                          <a:ea typeface="+mn-ea"/>
+                          <a:cs typeface="+mn-cs"/>
+                        </a:rPr>
+                        <a:t>0.937</a:t>
+                      </a:r>
+                      <a:endParaRPr dirty="0"/>
+                    </a:p>
+                  </a:txBody>
+                  <a:tcPr>
+                    <a:solidFill>
+                      <a:srgbClr val="05070D"/>
+                    </a:solidFill>
+                  </a:tcPr>
+                </a:tc>
+                <a:extLst>
+                  <a:ext uri="{0D108BD9-81ED-4DB2-BD59-A6C34878D82A}">
+                    <a16:rowId xmlns:a16="http://schemas.microsoft.com/office/drawing/2014/main" val="1994590469"/>
+                  </a:ext>
+                </a:extLst>
+              </a:tr>
+              <a:tr h="457200">
+                <a:tc>
+                  <a:txBody>
+                    <a:bodyPr/>
+                    <a:lstStyle/>
+                    <a:p>
+                      <a:pPr>
+                        <a:defRPr>
+                          <a:solidFill>
+                            <a:srgbClr val="FFFFFF"/>
+                          </a:solidFill>
+                        </a:defRPr>
+                      </a:pPr>
+                      <a:r>
+                        <a:rPr lang="en-US" dirty="0"/>
+                        <a:t>SVM</a:t>
+                      </a:r>
+                      <a:endParaRPr dirty="0"/>
+                    </a:p>
+                  </a:txBody>
+                  <a:tcPr>
+                    <a:solidFill>
+                      <a:srgbClr val="05070D"/>
+                    </a:solidFill>
+                  </a:tcPr>
+                </a:tc>
+                <a:tc>
+                  <a:txBody>
+                    <a:bodyPr/>
+                    <a:lstStyle/>
+                    <a:p>
+                      <a:pPr>
+                        <a:defRPr>
+                          <a:solidFill>
+                            <a:srgbClr val="FFFFFF"/>
+                          </a:solidFill>
+                        </a:defRPr>
+                      </a:pPr>
+                      <a:r>
+                        <a:rPr lang="en-US" sz="1800" b="0" i="0" kern="1200" dirty="0">
+                          <a:solidFill>
+                            <a:srgbClr val="FFFFFF"/>
+                          </a:solidFill>
+                          <a:effectLst/>
+                          <a:latin typeface="+mn-lt"/>
+                          <a:ea typeface="+mn-ea"/>
+                          <a:cs typeface="+mn-cs"/>
+                        </a:rPr>
+                        <a:t>0.854</a:t>
+                      </a:r>
+                      <a:endParaRPr dirty="0"/>
+                    </a:p>
+                  </a:txBody>
+                  <a:tcPr>
+                    <a:solidFill>
+                      <a:srgbClr val="05070D"/>
+                    </a:solidFill>
+                  </a:tcPr>
+                </a:tc>
+                <a:tc>
+                  <a:txBody>
+                    <a:bodyPr/>
+                    <a:lstStyle/>
+                    <a:p>
+                      <a:pPr>
+                        <a:defRPr>
+                          <a:solidFill>
+                            <a:srgbClr val="FFFFFF"/>
+                          </a:solidFill>
+                        </a:defRPr>
+                      </a:pPr>
+                      <a:r>
+                        <a:rPr lang="en-US" sz="1800" b="0" i="0" kern="1200" dirty="0">
+                          <a:solidFill>
+                            <a:srgbClr val="FFFFFF"/>
+                          </a:solidFill>
+                          <a:effectLst/>
+                          <a:latin typeface="+mn-lt"/>
+                          <a:ea typeface="+mn-ea"/>
+                          <a:cs typeface="+mn-cs"/>
+                        </a:rPr>
+                        <a:t>0.976</a:t>
+                      </a:r>
+                      <a:endParaRPr dirty="0"/>
+                    </a:p>
+                  </a:txBody>
+                  <a:tcPr>
+                    <a:solidFill>
+                      <a:srgbClr val="05070D"/>
+                    </a:solidFill>
+                  </a:tcPr>
+                </a:tc>
+                <a:tc>
+                  <a:txBody>
+                    <a:bodyPr/>
+                    <a:lstStyle/>
+                    <a:p>
+                      <a:pPr>
+                        <a:defRPr>
+                          <a:solidFill>
+                            <a:srgbClr val="FFFFFF"/>
+                          </a:solidFill>
+                        </a:defRPr>
+                      </a:pPr>
+                      <a:r>
+                        <a:rPr lang="en-US" sz="1800" b="0" i="0" kern="1200" dirty="0">
+                          <a:solidFill>
+                            <a:srgbClr val="FFFFFF"/>
+                          </a:solidFill>
+                          <a:effectLst/>
+                          <a:latin typeface="+mn-lt"/>
+                          <a:ea typeface="+mn-ea"/>
+                          <a:cs typeface="+mn-cs"/>
+                        </a:rPr>
+                        <a:t>0.854</a:t>
+                      </a:r>
+                      <a:endParaRPr dirty="0"/>
+                    </a:p>
+                  </a:txBody>
+                  <a:tcPr>
+                    <a:solidFill>
+                      <a:srgbClr val="05070D"/>
+                    </a:solidFill>
+                  </a:tcPr>
+                </a:tc>
+                <a:tc>
+                  <a:txBody>
+                    <a:bodyPr/>
+                    <a:lstStyle/>
+                    <a:p>
+                      <a:pPr>
+                        <a:defRPr>
+                          <a:solidFill>
+                            <a:srgbClr val="FFFFFF"/>
+                          </a:solidFill>
+                        </a:defRPr>
+                      </a:pPr>
+                      <a:r>
+                        <a:rPr lang="en-US" sz="1800" b="0" i="0" kern="1200" dirty="0">
+                          <a:solidFill>
+                            <a:srgbClr val="FFFFFF"/>
+                          </a:solidFill>
+                          <a:effectLst/>
+                          <a:latin typeface="+mn-lt"/>
+                          <a:ea typeface="+mn-ea"/>
+                          <a:cs typeface="+mn-cs"/>
+                        </a:rPr>
+                        <a:t>0.907</a:t>
+                      </a:r>
+                      <a:endParaRPr dirty="0"/>
+                    </a:p>
+                  </a:txBody>
+                  <a:tcPr>
+                    <a:solidFill>
+                      <a:srgbClr val="05070D"/>
+                    </a:solidFill>
+                  </a:tcPr>
+                </a:tc>
+                <a:extLst>
+                  <a:ext uri="{0D108BD9-81ED-4DB2-BD59-A6C34878D82A}">
+                    <a16:rowId xmlns:a16="http://schemas.microsoft.com/office/drawing/2014/main" val="719580962"/>
+                  </a:ext>
+                </a:extLst>
+              </a:tr>
+              <a:tr h="457200">
+                <a:tc>
+                  <a:txBody>
+                    <a:bodyPr/>
+                    <a:lstStyle/>
+                    <a:p>
+                      <a:pPr>
+                        <a:defRPr>
+                          <a:solidFill>
+                            <a:srgbClr val="FFFFFF"/>
+                          </a:solidFill>
+                        </a:defRPr>
+                      </a:pPr>
+                      <a:r>
+                        <a:rPr dirty="0"/>
+                        <a:t>Logistic Regression</a:t>
+                      </a:r>
+                    </a:p>
+                  </a:txBody>
+                  <a:tcPr>
+                    <a:solidFill>
+                      <a:srgbClr val="05070D"/>
+                    </a:solidFill>
+                  </a:tcPr>
+                </a:tc>
+                <a:tc>
+                  <a:txBody>
+                    <a:bodyPr/>
+                    <a:lstStyle/>
+                    <a:p>
+                      <a:pPr>
+                        <a:defRPr>
+                          <a:solidFill>
+                            <a:srgbClr val="FFFFFF"/>
+                          </a:solidFill>
+                        </a:defRPr>
+                      </a:pPr>
+                      <a:r>
+                        <a:rPr lang="en-US" sz="1800" b="0" i="0" kern="1200" dirty="0">
+                          <a:solidFill>
+                            <a:srgbClr val="FFFFFF"/>
+                          </a:solidFill>
+                          <a:effectLst/>
+                          <a:latin typeface="+mn-lt"/>
+                          <a:ea typeface="+mn-ea"/>
+                          <a:cs typeface="+mn-cs"/>
+                        </a:rPr>
+                        <a:t>0.611</a:t>
+                      </a:r>
+                      <a:endParaRPr dirty="0"/>
+                    </a:p>
+                  </a:txBody>
+                  <a:tcPr>
+                    <a:solidFill>
+                      <a:srgbClr val="05070D"/>
+                    </a:solidFill>
+                  </a:tcPr>
+                </a:tc>
+                <a:tc>
+                  <a:txBody>
+                    <a:bodyPr/>
+                    <a:lstStyle/>
+                    <a:p>
+                      <a:pPr>
+                        <a:defRPr>
+                          <a:solidFill>
+                            <a:srgbClr val="FFFFFF"/>
+                          </a:solidFill>
+                        </a:defRPr>
+                      </a:pPr>
+                      <a:r>
+                        <a:rPr lang="en-US" sz="1800" b="0" i="0" kern="1200" dirty="0">
+                          <a:solidFill>
+                            <a:srgbClr val="FFFFFF"/>
+                          </a:solidFill>
+                          <a:effectLst/>
+                          <a:latin typeface="+mn-lt"/>
+                          <a:ea typeface="+mn-ea"/>
+                          <a:cs typeface="+mn-cs"/>
+                        </a:rPr>
+                        <a:t>0.974</a:t>
+                      </a:r>
+                      <a:endParaRPr dirty="0"/>
+                    </a:p>
+                  </a:txBody>
+                  <a:tcPr>
+                    <a:solidFill>
+                      <a:srgbClr val="05070D"/>
+                    </a:solidFill>
+                  </a:tcPr>
+                </a:tc>
+                <a:tc>
+                  <a:txBody>
+                    <a:bodyPr/>
+                    <a:lstStyle/>
+                    <a:p>
+                      <a:pPr>
+                        <a:defRPr>
+                          <a:solidFill>
+                            <a:srgbClr val="FFFFFF"/>
+                          </a:solidFill>
+                        </a:defRPr>
+                      </a:pPr>
+                      <a:r>
+                        <a:rPr lang="en-US" sz="1800" b="0" i="0" kern="1200" dirty="0">
+                          <a:solidFill>
+                            <a:srgbClr val="FFFFFF"/>
+                          </a:solidFill>
+                          <a:effectLst/>
+                          <a:latin typeface="+mn-lt"/>
+                          <a:ea typeface="+mn-ea"/>
+                          <a:cs typeface="+mn-cs"/>
+                        </a:rPr>
+                        <a:t>0.611</a:t>
+                      </a:r>
+                      <a:endParaRPr dirty="0"/>
+                    </a:p>
+                  </a:txBody>
+                  <a:tcPr>
+                    <a:solidFill>
+                      <a:srgbClr val="05070D"/>
+                    </a:solidFill>
+                  </a:tcPr>
+                </a:tc>
+                <a:tc>
+                  <a:txBody>
+                    <a:bodyPr/>
+                    <a:lstStyle/>
+                    <a:p>
+                      <a:pPr>
+                        <a:defRPr>
+                          <a:solidFill>
+                            <a:srgbClr val="FFFFFF"/>
+                          </a:solidFill>
+                        </a:defRPr>
+                      </a:pPr>
+                      <a:r>
+                        <a:rPr lang="en-US" sz="1800" b="0" i="0" kern="1200" dirty="0">
+                          <a:solidFill>
+                            <a:srgbClr val="FFFFFF"/>
+                          </a:solidFill>
+                          <a:effectLst/>
+                          <a:latin typeface="+mn-lt"/>
+                          <a:ea typeface="+mn-ea"/>
+                          <a:cs typeface="+mn-cs"/>
+                        </a:rPr>
+                        <a:t>0.740</a:t>
+                      </a:r>
+                      <a:endParaRPr dirty="0"/>
+                    </a:p>
+                  </a:txBody>
+                  <a:tcPr>
+                    <a:solidFill>
+                      <a:srgbClr val="05070D"/>
+                    </a:solidFill>
+                  </a:tcPr>
+                </a:tc>
+                <a:extLst>
+                  <a:ext uri="{0D108BD9-81ED-4DB2-BD59-A6C34878D82A}">
+                    <a16:rowId xmlns:a16="http://schemas.microsoft.com/office/drawing/2014/main" val="10004"/>
+                  </a:ext>
+                </a:extLst>
+              </a:tr>
+            </a:tbl>
+          </a:graphicData>
+        </a:graphic>
+      </p:graphicFrame>
     </p:spTree>
+    <p:extLst>
+      <p:ext uri="{BB962C8B-B14F-4D97-AF65-F5344CB8AC3E}">
+        <p14:creationId xmlns:p14="http://schemas.microsoft.com/office/powerpoint/2010/main" val="3646328999"/>
+      </p:ext>
+    </p:extLst>
   </p:cSld>
   <p:clrMapOvr>
     <a:masterClrMapping/>
@@ -5086,7 +6626,7 @@
               </a:defRPr>
             </a:pPr>
             <a:r>
-              <a:t>14 / PERFORMANCE</a:t>
+              <a:t>13 / METRICS</a:t>
             </a:r>
           </a:p>
         </p:txBody>
@@ -5125,7 +6665,7 @@
               </a:defRPr>
             </a:pPr>
             <a:r>
-              <a:t>XGBoost Performance Metrics</a:t>
+              <a:t>The Business Objective: Maximizing Recall</a:t>
             </a:r>
           </a:p>
         </p:txBody>
@@ -5138,8 +6678,8 @@
         </p:nvSpPr>
         <p:spPr>
           <a:xfrm>
-            <a:off x="914400" y="2286000"/>
-            <a:ext cx="4572000" cy="2286000"/>
+            <a:off x="1828800" y="2286000"/>
+            <a:ext cx="8531352" cy="1828800"/>
           </a:xfrm>
           <a:prstGeom prst="roundRect">
             <a:avLst/>
@@ -5178,12 +6718,12 @@
             <a:pPr algn="ctr">
               <a:defRPr sz="2000" b="1">
                 <a:solidFill>
-                  <a:srgbClr val="5FD4E8"/>
+                  <a:srgbClr val="F2B06D"/>
                 </a:solidFill>
               </a:defRPr>
             </a:pPr>
             <a:r>
-              <a:t>Binary Classification (Fail / Safe)</a:t>
+              <a:t>False Negative = Disasters</a:t>
             </a:r>
             <a:br/>
             <a:endParaRPr/>
@@ -5197,15 +6737,7 @@
               </a:defRPr>
             </a:pPr>
             <a:r>
-              <a:t>F1-Score: 0.748</a:t>
-            </a:r>
-            <a:br/>
-            <a:r>
-              <a:t>Recall: 0.809</a:t>
-            </a:r>
-            <a:br/>
-            <a:r>
-              <a:t>AUC-ROC: 0.980</a:t>
+              <a:t>Predicting 'Safe' when the machine is actually failing results in catastrophic breakdown and halts production.</a:t>
             </a:r>
           </a:p>
         </p:txBody>
@@ -5218,8 +6750,8 @@
         </p:nvSpPr>
         <p:spPr>
           <a:xfrm>
-            <a:off x="6702552" y="2286000"/>
-            <a:ext cx="4572000" cy="2286000"/>
+            <a:off x="1828800" y="4389120"/>
+            <a:ext cx="8531352" cy="1828800"/>
           </a:xfrm>
           <a:prstGeom prst="roundRect">
             <a:avLst/>
@@ -5258,12 +6790,12 @@
             <a:pPr algn="ctr">
               <a:defRPr sz="2000" b="1">
                 <a:solidFill>
-                  <a:srgbClr val="F2B06D"/>
+                  <a:srgbClr val="8A97A8"/>
                 </a:solidFill>
               </a:defRPr>
             </a:pPr>
             <a:r>
-              <a:t>Multi-class (Failure Type)</a:t>
+              <a:t>False Positive = Minor Cost</a:t>
             </a:r>
             <a:br/>
             <a:endParaRPr/>
@@ -5277,54 +6809,7 @@
               </a:defRPr>
             </a:pPr>
             <a:r>
-              <a:t>Weighted F1: 0.981</a:t>
-            </a:r>
-            <a:br/>
-            <a:r>
-              <a:t>Weighted Recall: 0.987</a:t>
-            </a:r>
-            <a:br/>
-            <a:r>
-              <a:t>Accuracy: 97.7%</a:t>
-            </a:r>
-          </a:p>
-        </p:txBody>
-      </p:sp>
-      <p:sp>
-        <p:nvSpPr>
-          <p:cNvPr id="6" name="TextBox 5"/>
-          <p:cNvSpPr txBox="1"/>
-          <p:nvPr/>
-        </p:nvSpPr>
-        <p:spPr>
-          <a:xfrm>
-            <a:off x="457200" y="5029200"/>
-            <a:ext cx="10972800" cy="4572000"/>
-          </a:xfrm>
-          <a:prstGeom prst="rect">
-            <a:avLst/>
-          </a:prstGeom>
-          <a:noFill/>
-        </p:spPr>
-        <p:txBody>
-          <a:bodyPr wrap="square">
-            <a:spAutoFit/>
-          </a:bodyPr>
-          <a:lstStyle/>
-          <a:p>
-            <a:endParaRPr/>
-          </a:p>
-          <a:p>
-            <a:pPr>
-              <a:defRPr sz="2200">
-                <a:solidFill>
-                  <a:srgbClr val="FFFFFF"/>
-                </a:solidFill>
-                <a:latin typeface="Arial"/>
-              </a:defRPr>
-            </a:pPr>
-            <a:r>
-              <a:t>XGBoost successfully handled the highly imbalanced nature of the dataset (combined with SMOTE) and effectively captured the non-linear relationships in the sensor readings (like Power and Torque).</a:t>
+              <a:t>Predicting 'Failure' when it is safe only requires a brief routine inspection.</a:t>
             </a:r>
           </a:p>
         </p:txBody>
@@ -5399,7 +6884,7 @@
               </a:defRPr>
             </a:pPr>
             <a:r>
-              <a:t>15 / DASHBOARD</a:t>
+              <a:t>14 / PERFORMANCE</a:t>
             </a:r>
           </a:p>
         </p:txBody>
@@ -5438,20 +6923,180 @@
               </a:defRPr>
             </a:pPr>
             <a:r>
-              <a:t>Interactive Monitoring Dashboard</a:t>
-            </a:r>
-          </a:p>
-        </p:txBody>
-      </p:sp>
-      <p:sp>
-        <p:nvSpPr>
-          <p:cNvPr id="4" name="TextBox 3"/>
+              <a:t>XGBoost Performance Metrics</a:t>
+            </a:r>
+          </a:p>
+        </p:txBody>
+      </p:sp>
+      <p:sp>
+        <p:nvSpPr>
+          <p:cNvPr id="4" name="Rounded Rectangle 3"/>
+          <p:cNvSpPr/>
+          <p:nvPr/>
+        </p:nvSpPr>
+        <p:spPr>
+          <a:xfrm>
+            <a:off x="914400" y="2286000"/>
+            <a:ext cx="4572000" cy="2286000"/>
+          </a:xfrm>
+          <a:prstGeom prst="roundRect">
+            <a:avLst/>
+          </a:prstGeom>
+          <a:solidFill>
+            <a:srgbClr val="05070D"/>
+          </a:solidFill>
+          <a:ln w="25400">
+            <a:solidFill>
+              <a:srgbClr val="1C2735"/>
+            </a:solidFill>
+          </a:ln>
+        </p:spPr>
+        <p:style>
+          <a:lnRef idx="1">
+            <a:schemeClr val="accent1"/>
+          </a:lnRef>
+          <a:fillRef idx="3">
+            <a:schemeClr val="accent1"/>
+          </a:fillRef>
+          <a:effectRef idx="2">
+            <a:schemeClr val="accent1"/>
+          </a:effectRef>
+          <a:fontRef idx="minor">
+            <a:schemeClr val="lt1"/>
+          </a:fontRef>
+        </p:style>
+        <p:txBody>
+          <a:bodyPr wrap="square" rtlCol="0" anchor="ctr"/>
+          <a:lstStyle/>
+          <a:p>
+            <a:pPr algn="ctr"/>
+            <a:endParaRPr/>
+          </a:p>
+          <a:p>
+            <a:pPr algn="ctr">
+              <a:defRPr sz="2000" b="1">
+                <a:solidFill>
+                  <a:srgbClr val="5FD4E8"/>
+                </a:solidFill>
+              </a:defRPr>
+            </a:pPr>
+            <a:r>
+              <a:t>Binary Classification (Fail / Safe)</a:t>
+            </a:r>
+            <a:br/>
+            <a:endParaRPr/>
+          </a:p>
+          <a:p>
+            <a:pPr algn="ctr">
+              <a:defRPr sz="1400">
+                <a:solidFill>
+                  <a:srgbClr val="FFFFFF"/>
+                </a:solidFill>
+              </a:defRPr>
+            </a:pPr>
+            <a:r>
+              <a:t>F1-Score: 0.748</a:t>
+            </a:r>
+            <a:br/>
+            <a:r>
+              <a:t>Recall: 0.809</a:t>
+            </a:r>
+            <a:br/>
+            <a:r>
+              <a:t>AUC-ROC: 0.980</a:t>
+            </a:r>
+          </a:p>
+        </p:txBody>
+      </p:sp>
+      <p:sp>
+        <p:nvSpPr>
+          <p:cNvPr id="5" name="Rounded Rectangle 4"/>
+          <p:cNvSpPr/>
+          <p:nvPr/>
+        </p:nvSpPr>
+        <p:spPr>
+          <a:xfrm>
+            <a:off x="6702552" y="2286000"/>
+            <a:ext cx="4572000" cy="2286000"/>
+          </a:xfrm>
+          <a:prstGeom prst="roundRect">
+            <a:avLst/>
+          </a:prstGeom>
+          <a:solidFill>
+            <a:srgbClr val="05070D"/>
+          </a:solidFill>
+          <a:ln w="25400">
+            <a:solidFill>
+              <a:srgbClr val="1C2735"/>
+            </a:solidFill>
+          </a:ln>
+        </p:spPr>
+        <p:style>
+          <a:lnRef idx="1">
+            <a:schemeClr val="accent1"/>
+          </a:lnRef>
+          <a:fillRef idx="3">
+            <a:schemeClr val="accent1"/>
+          </a:fillRef>
+          <a:effectRef idx="2">
+            <a:schemeClr val="accent1"/>
+          </a:effectRef>
+          <a:fontRef idx="minor">
+            <a:schemeClr val="lt1"/>
+          </a:fontRef>
+        </p:style>
+        <p:txBody>
+          <a:bodyPr wrap="square" rtlCol="0" anchor="ctr"/>
+          <a:lstStyle/>
+          <a:p>
+            <a:pPr algn="ctr"/>
+            <a:endParaRPr/>
+          </a:p>
+          <a:p>
+            <a:pPr algn="ctr">
+              <a:defRPr sz="2000" b="1">
+                <a:solidFill>
+                  <a:srgbClr val="F2B06D"/>
+                </a:solidFill>
+              </a:defRPr>
+            </a:pPr>
+            <a:r>
+              <a:t>Multi-class (Failure Type)</a:t>
+            </a:r>
+            <a:br/>
+            <a:endParaRPr/>
+          </a:p>
+          <a:p>
+            <a:pPr algn="ctr">
+              <a:defRPr sz="1400">
+                <a:solidFill>
+                  <a:srgbClr val="FFFFFF"/>
+                </a:solidFill>
+              </a:defRPr>
+            </a:pPr>
+            <a:r>
+              <a:t>Weighted F1: 0.981</a:t>
+            </a:r>
+            <a:br/>
+            <a:r>
+              <a:t>Weighted Recall: 0.987</a:t>
+            </a:r>
+            <a:br/>
+            <a:r>
+              <a:t>Accuracy: 97.7%</a:t>
+            </a:r>
+          </a:p>
+        </p:txBody>
+      </p:sp>
+      <p:sp>
+        <p:nvSpPr>
+          <p:cNvPr id="6" name="TextBox 5"/>
           <p:cNvSpPr txBox="1"/>
           <p:nvPr/>
         </p:nvSpPr>
         <p:spPr>
           <a:xfrm>
-            <a:off x="457200" y="2286000"/>
+            <a:off x="457200" y="5029200"/>
             <a:ext cx="10972800" cy="4572000"/>
           </a:xfrm>
           <a:prstGeom prst="rect">
@@ -5469,7 +7114,7 @@
           </a:p>
           <a:p>
             <a:pPr>
-              <a:defRPr sz="2400">
+              <a:defRPr sz="2200">
                 <a:solidFill>
                   <a:srgbClr val="FFFFFF"/>
                 </a:solidFill>
@@ -5477,24 +7122,7 @@
               </a:defRPr>
             </a:pPr>
             <a:r>
-              <a:t>We built a fully interactive web application using Streamlit to deploy the models into a production-like environment.</a:t>
-            </a:r>
-            <a:br/>
-            <a:br/>
-            <a:r>
-              <a:t>Key Features:</a:t>
-            </a:r>
-            <a:br/>
-            <a:r>
-              <a:t>• Dark Industrial Theme for operator environments.</a:t>
-            </a:r>
-            <a:br/>
-            <a:r>
-              <a:t>• Two-Stage Live Prediction Engine.</a:t>
-            </a:r>
-            <a:br/>
-            <a:r>
-              <a:t>• Real-time confidence metrics and Model Performance insights.</a:t>
+              <a:t>XGBoost successfully handled the highly imbalanced nature of the dataset (combined with SMOTE) and effectively captured the non-linear relationships in the sensor readings (like Power and Torque).</a:t>
             </a:r>
           </a:p>
         </p:txBody>
@@ -5569,7 +7197,7 @@
               </a:defRPr>
             </a:pPr>
             <a:r>
-              <a:t>16 / LIVE DEMO</a:t>
+              <a:t>15 / DASHBOARD</a:t>
             </a:r>
           </a:p>
         </p:txBody>
@@ -5608,42 +7236,74 @@
               </a:defRPr>
             </a:pPr>
             <a:r>
-              <a:t>Live Demo: Dashboard Interface</a:t>
-            </a:r>
-          </a:p>
-        </p:txBody>
-      </p:sp>
-      <p:pic>
-        <p:nvPicPr>
-          <p:cNvPr id="4" name="Picture 3" descr="media_1787619297829.png"/>
-          <p:cNvPicPr>
-            <a:picLocks noChangeAspect="1"/>
-          </p:cNvPicPr>
+              <a:t>Interactive Monitoring Dashboard</a:t>
+            </a:r>
+          </a:p>
+        </p:txBody>
+      </p:sp>
+      <p:sp>
+        <p:nvSpPr>
+          <p:cNvPr id="4" name="TextBox 3"/>
+          <p:cNvSpPr txBox="1"/>
           <p:nvPr/>
-        </p:nvPicPr>
-        <p:blipFill>
-          <a:blip r:embed="rId2"/>
-          <a:stretch>
-            <a:fillRect/>
-          </a:stretch>
-        </p:blipFill>
+        </p:nvSpPr>
         <p:spPr>
           <a:xfrm>
-            <a:off x="1371600" y="1828800"/>
-            <a:ext cx="9445752" cy="3569830"/>
+            <a:off x="457200" y="2286000"/>
+            <a:ext cx="10972800" cy="4572000"/>
           </a:xfrm>
           <a:prstGeom prst="rect">
             <a:avLst/>
           </a:prstGeom>
+          <a:noFill/>
         </p:spPr>
-      </p:pic>
+        <p:txBody>
+          <a:bodyPr wrap="square">
+            <a:spAutoFit/>
+          </a:bodyPr>
+          <a:lstStyle/>
+          <a:p>
+            <a:endParaRPr/>
+          </a:p>
+          <a:p>
+            <a:pPr>
+              <a:defRPr sz="2400">
+                <a:solidFill>
+                  <a:srgbClr val="FFFFFF"/>
+                </a:solidFill>
+                <a:latin typeface="Arial"/>
+              </a:defRPr>
+            </a:pPr>
+            <a:r>
+              <a:t>We built a fully interactive web application using Streamlit to deploy the models into a production-like environment.</a:t>
+            </a:r>
+            <a:br/>
+            <a:br/>
+            <a:r>
+              <a:t>Key Features:</a:t>
+            </a:r>
+            <a:br/>
+            <a:r>
+              <a:t>• Dark Industrial Theme for operator environments.</a:t>
+            </a:r>
+            <a:br/>
+            <a:r>
+              <a:t>• Two-Stage Live Prediction Engine.</a:t>
+            </a:r>
+            <a:br/>
+            <a:r>
+              <a:t>• Real-time confidence metrics and Model Performance insights.</a:t>
+            </a:r>
+          </a:p>
+        </p:txBody>
+      </p:sp>
     </p:spTree>
   </p:cSld>
   <p:clrMapOvr>
     <a:masterClrMapping/>
   </p:clrMapOvr>
   <p:transition spd="slow">
-    <p:push dir="u"/>
+    <p:wipe/>
   </p:transition>
 </p:sld>
 </file>
@@ -5707,7 +7367,7 @@
               </a:defRPr>
             </a:pPr>
             <a:r>
-              <a:t>17 / LIVE DEMO</a:t>
+              <a:t>16 / LIVE DEMO</a:t>
             </a:r>
           </a:p>
         </p:txBody>
@@ -5746,14 +7406,14 @@
               </a:defRPr>
             </a:pPr>
             <a:r>
-              <a:t>Live Demo: Two-Stage Prediction</a:t>
+              <a:t>Live Demo: Dashboard Interface</a:t>
             </a:r>
           </a:p>
         </p:txBody>
       </p:sp>
       <p:pic>
         <p:nvPicPr>
-          <p:cNvPr id="4" name="Picture 3" descr="media_1787619297835.png"/>
+          <p:cNvPr id="4" name="Picture 3" descr="media_1787619297829.png"/>
           <p:cNvPicPr>
             <a:picLocks noChangeAspect="1"/>
           </p:cNvPicPr>
@@ -5768,7 +7428,7 @@
         <p:spPr>
           <a:xfrm>
             <a:off x="1371600" y="1828800"/>
-            <a:ext cx="9445752" cy="4390799"/>
+            <a:ext cx="9445752" cy="3569830"/>
           </a:xfrm>
           <a:prstGeom prst="rect">
             <a:avLst/>
@@ -5845,7 +7505,7 @@
               </a:defRPr>
             </a:pPr>
             <a:r>
-              <a:t>18 / LIVE DEMO</a:t>
+              <a:t>17 / LIVE DEMO</a:t>
             </a:r>
           </a:p>
         </p:txBody>
@@ -5884,14 +7544,14 @@
               </a:defRPr>
             </a:pPr>
             <a:r>
-              <a:t>Live Demo: Model Insights</a:t>
+              <a:t>Live Demo: Two-Stage Prediction</a:t>
             </a:r>
           </a:p>
         </p:txBody>
       </p:sp>
       <p:pic>
         <p:nvPicPr>
-          <p:cNvPr id="4" name="Picture 3" descr="media_1787619297837.png"/>
+          <p:cNvPr id="4" name="Picture 3" descr="media_1787619297835.png"/>
           <p:cNvPicPr>
             <a:picLocks noChangeAspect="1"/>
           </p:cNvPicPr>
@@ -5906,7 +7566,7 @@
         <p:spPr>
           <a:xfrm>
             <a:off x="1371600" y="1828800"/>
-            <a:ext cx="9445752" cy="4667530"/>
+            <a:ext cx="9445752" cy="4390799"/>
           </a:xfrm>
           <a:prstGeom prst="rect">
             <a:avLst/>
@@ -5983,7 +7643,7 @@
               </a:defRPr>
             </a:pPr>
             <a:r>
-              <a:t>19 / LIMITATIONS</a:t>
+              <a:t>18 / LIVE DEMO</a:t>
             </a:r>
           </a:p>
         </p:txBody>
@@ -5997,7 +7657,7 @@
         <p:spPr>
           <a:xfrm>
             <a:off x="457200" y="731520"/>
-            <a:ext cx="4416594" cy="923330"/>
+            <a:ext cx="10972800" cy="914400"/>
           </a:xfrm>
           <a:prstGeom prst="rect">
             <a:avLst/>
@@ -6010,11 +7670,7 @@
           </a:bodyPr>
           <a:lstStyle/>
           <a:p>
-            <a:endParaRPr dirty="0">
-              <a:solidFill>
-                <a:srgbClr val="FF0000"/>
-              </a:solidFill>
-            </a:endParaRPr>
+            <a:endParaRPr/>
           </a:p>
           <a:p>
             <a:pPr>
@@ -6026,156 +7682,35 @@
               </a:defRPr>
             </a:pPr>
             <a:r>
-              <a:rPr dirty="0"/>
-              <a:t>System Limitations</a:t>
-            </a:r>
-          </a:p>
-        </p:txBody>
-      </p:sp>
-      <p:sp>
-        <p:nvSpPr>
-          <p:cNvPr id="4" name="Rounded Rectangle 3"/>
-          <p:cNvSpPr/>
+              <a:t>Live Demo: Model Insights</a:t>
+            </a:r>
+          </a:p>
+        </p:txBody>
+      </p:sp>
+      <p:pic>
+        <p:nvPicPr>
+          <p:cNvPr id="4" name="Picture 3" descr="media_1787619297837.png"/>
+          <p:cNvPicPr>
+            <a:picLocks noChangeAspect="1"/>
+          </p:cNvPicPr>
           <p:nvPr/>
-        </p:nvSpPr>
+        </p:nvPicPr>
+        <p:blipFill>
+          <a:blip r:embed="rId2"/>
+          <a:stretch>
+            <a:fillRect/>
+          </a:stretch>
+        </p:blipFill>
         <p:spPr>
           <a:xfrm>
-            <a:off x="914400" y="2286000"/>
-            <a:ext cx="4572000" cy="2743200"/>
+            <a:off x="1371600" y="1828800"/>
+            <a:ext cx="9445752" cy="4667530"/>
           </a:xfrm>
-          <a:prstGeom prst="roundRect">
+          <a:prstGeom prst="rect">
             <a:avLst/>
           </a:prstGeom>
-          <a:solidFill>
-            <a:srgbClr val="05070D"/>
-          </a:solidFill>
-          <a:ln w="25400">
-            <a:solidFill>
-              <a:srgbClr val="1C2735"/>
-            </a:solidFill>
-          </a:ln>
         </p:spPr>
-        <p:style>
-          <a:lnRef idx="1">
-            <a:schemeClr val="accent1"/>
-          </a:lnRef>
-          <a:fillRef idx="3">
-            <a:schemeClr val="accent1"/>
-          </a:fillRef>
-          <a:effectRef idx="2">
-            <a:schemeClr val="accent1"/>
-          </a:effectRef>
-          <a:fontRef idx="minor">
-            <a:schemeClr val="lt1"/>
-          </a:fontRef>
-        </p:style>
-        <p:txBody>
-          <a:bodyPr wrap="square" rtlCol="0" anchor="ctr"/>
-          <a:lstStyle/>
-          <a:p>
-            <a:pPr algn="ctr"/>
-            <a:endParaRPr/>
-          </a:p>
-          <a:p>
-            <a:pPr algn="ctr">
-              <a:defRPr sz="2000" b="1">
-                <a:solidFill>
-                  <a:srgbClr val="F2B06D"/>
-                </a:solidFill>
-              </a:defRPr>
-            </a:pPr>
-            <a:r>
-              <a:t>Random Failures (RNF)</a:t>
-            </a:r>
-            <a:br/>
-            <a:endParaRPr/>
-          </a:p>
-          <a:p>
-            <a:pPr algn="ctr">
-              <a:defRPr sz="1400">
-                <a:solidFill>
-                  <a:srgbClr val="FFFFFF"/>
-                </a:solidFill>
-              </a:defRPr>
-            </a:pPr>
-            <a:r>
-              <a:t>Inherently stochastic and physically unpredictable by definition. Performance on this specific class is theoretically capped.</a:t>
-            </a:r>
-          </a:p>
-        </p:txBody>
-      </p:sp>
-      <p:sp>
-        <p:nvSpPr>
-          <p:cNvPr id="5" name="Rounded Rectangle 4"/>
-          <p:cNvSpPr/>
-          <p:nvPr/>
-        </p:nvSpPr>
-        <p:spPr>
-          <a:xfrm>
-            <a:off x="6702552" y="2286000"/>
-            <a:ext cx="4572000" cy="2743200"/>
-          </a:xfrm>
-          <a:prstGeom prst="roundRect">
-            <a:avLst/>
-          </a:prstGeom>
-          <a:solidFill>
-            <a:srgbClr val="05070D"/>
-          </a:solidFill>
-          <a:ln w="25400">
-            <a:solidFill>
-              <a:srgbClr val="1C2735"/>
-            </a:solidFill>
-          </a:ln>
-        </p:spPr>
-        <p:style>
-          <a:lnRef idx="1">
-            <a:schemeClr val="accent1"/>
-          </a:lnRef>
-          <a:fillRef idx="3">
-            <a:schemeClr val="accent1"/>
-          </a:fillRef>
-          <a:effectRef idx="2">
-            <a:schemeClr val="accent1"/>
-          </a:effectRef>
-          <a:fontRef idx="minor">
-            <a:schemeClr val="lt1"/>
-          </a:fontRef>
-        </p:style>
-        <p:txBody>
-          <a:bodyPr wrap="square" rtlCol="0" anchor="ctr"/>
-          <a:lstStyle/>
-          <a:p>
-            <a:pPr algn="ctr"/>
-            <a:endParaRPr/>
-          </a:p>
-          <a:p>
-            <a:pPr algn="ctr">
-              <a:defRPr sz="2000" b="1">
-                <a:solidFill>
-                  <a:srgbClr val="8A97A8"/>
-                </a:solidFill>
-              </a:defRPr>
-            </a:pPr>
-            <a:r>
-              <a:t>Synthetic Dataset</a:t>
-            </a:r>
-            <a:br/>
-            <a:endParaRPr/>
-          </a:p>
-          <a:p>
-            <a:pPr algn="ctr">
-              <a:defRPr sz="1400">
-                <a:solidFill>
-                  <a:srgbClr val="FFFFFF"/>
-                </a:solidFill>
-              </a:defRPr>
-            </a:pPr>
-            <a:r>
-              <a:t>While AI4I 2020 strictly mirrors physical laws, models must be fine-tuned on physical sensor streams before production deployment.</a:t>
-            </a:r>
-          </a:p>
-        </p:txBody>
-      </p:sp>
+      </p:pic>
     </p:spTree>
   </p:cSld>
   <p:clrMapOvr>
@@ -6419,6 +7954,269 @@
               </a:defRPr>
             </a:pPr>
             <a:r>
+              <a:t>19 / LIMITATIONS</a:t>
+            </a:r>
+          </a:p>
+        </p:txBody>
+      </p:sp>
+      <p:sp>
+        <p:nvSpPr>
+          <p:cNvPr id="3" name="TextBox 2"/>
+          <p:cNvSpPr txBox="1"/>
+          <p:nvPr/>
+        </p:nvSpPr>
+        <p:spPr>
+          <a:xfrm>
+            <a:off x="457200" y="731520"/>
+            <a:ext cx="4416594" cy="923330"/>
+          </a:xfrm>
+          <a:prstGeom prst="rect">
+            <a:avLst/>
+          </a:prstGeom>
+          <a:noFill/>
+        </p:spPr>
+        <p:txBody>
+          <a:bodyPr wrap="none">
+            <a:spAutoFit/>
+          </a:bodyPr>
+          <a:lstStyle/>
+          <a:p>
+            <a:endParaRPr dirty="0">
+              <a:solidFill>
+                <a:srgbClr val="FF0000"/>
+              </a:solidFill>
+            </a:endParaRPr>
+          </a:p>
+          <a:p>
+            <a:pPr>
+              <a:defRPr sz="3600" b="1">
+                <a:solidFill>
+                  <a:srgbClr val="FFFFFF"/>
+                </a:solidFill>
+                <a:latin typeface="Arial"/>
+              </a:defRPr>
+            </a:pPr>
+            <a:r>
+              <a:rPr dirty="0"/>
+              <a:t>System Limitations</a:t>
+            </a:r>
+          </a:p>
+        </p:txBody>
+      </p:sp>
+      <p:sp>
+        <p:nvSpPr>
+          <p:cNvPr id="4" name="Rounded Rectangle 3"/>
+          <p:cNvSpPr/>
+          <p:nvPr/>
+        </p:nvSpPr>
+        <p:spPr>
+          <a:xfrm>
+            <a:off x="914400" y="2286000"/>
+            <a:ext cx="4572000" cy="2743200"/>
+          </a:xfrm>
+          <a:prstGeom prst="roundRect">
+            <a:avLst/>
+          </a:prstGeom>
+          <a:solidFill>
+            <a:srgbClr val="05070D"/>
+          </a:solidFill>
+          <a:ln w="25400">
+            <a:solidFill>
+              <a:srgbClr val="1C2735"/>
+            </a:solidFill>
+          </a:ln>
+        </p:spPr>
+        <p:style>
+          <a:lnRef idx="1">
+            <a:schemeClr val="accent1"/>
+          </a:lnRef>
+          <a:fillRef idx="3">
+            <a:schemeClr val="accent1"/>
+          </a:fillRef>
+          <a:effectRef idx="2">
+            <a:schemeClr val="accent1"/>
+          </a:effectRef>
+          <a:fontRef idx="minor">
+            <a:schemeClr val="lt1"/>
+          </a:fontRef>
+        </p:style>
+        <p:txBody>
+          <a:bodyPr wrap="square" rtlCol="0" anchor="ctr"/>
+          <a:lstStyle/>
+          <a:p>
+            <a:pPr algn="ctr"/>
+            <a:endParaRPr/>
+          </a:p>
+          <a:p>
+            <a:pPr algn="ctr">
+              <a:defRPr sz="2000" b="1">
+                <a:solidFill>
+                  <a:srgbClr val="F2B06D"/>
+                </a:solidFill>
+              </a:defRPr>
+            </a:pPr>
+            <a:r>
+              <a:t>Random Failures (RNF)</a:t>
+            </a:r>
+            <a:br/>
+            <a:endParaRPr/>
+          </a:p>
+          <a:p>
+            <a:pPr algn="ctr">
+              <a:defRPr sz="1400">
+                <a:solidFill>
+                  <a:srgbClr val="FFFFFF"/>
+                </a:solidFill>
+              </a:defRPr>
+            </a:pPr>
+            <a:r>
+              <a:t>Inherently stochastic and physically unpredictable by definition. Performance on this specific class is theoretically capped.</a:t>
+            </a:r>
+          </a:p>
+        </p:txBody>
+      </p:sp>
+      <p:sp>
+        <p:nvSpPr>
+          <p:cNvPr id="5" name="Rounded Rectangle 4"/>
+          <p:cNvSpPr/>
+          <p:nvPr/>
+        </p:nvSpPr>
+        <p:spPr>
+          <a:xfrm>
+            <a:off x="6702552" y="2286000"/>
+            <a:ext cx="4572000" cy="2743200"/>
+          </a:xfrm>
+          <a:prstGeom prst="roundRect">
+            <a:avLst/>
+          </a:prstGeom>
+          <a:solidFill>
+            <a:srgbClr val="05070D"/>
+          </a:solidFill>
+          <a:ln w="25400">
+            <a:solidFill>
+              <a:srgbClr val="1C2735"/>
+            </a:solidFill>
+          </a:ln>
+        </p:spPr>
+        <p:style>
+          <a:lnRef idx="1">
+            <a:schemeClr val="accent1"/>
+          </a:lnRef>
+          <a:fillRef idx="3">
+            <a:schemeClr val="accent1"/>
+          </a:fillRef>
+          <a:effectRef idx="2">
+            <a:schemeClr val="accent1"/>
+          </a:effectRef>
+          <a:fontRef idx="minor">
+            <a:schemeClr val="lt1"/>
+          </a:fontRef>
+        </p:style>
+        <p:txBody>
+          <a:bodyPr wrap="square" rtlCol="0" anchor="ctr"/>
+          <a:lstStyle/>
+          <a:p>
+            <a:pPr algn="ctr"/>
+            <a:endParaRPr/>
+          </a:p>
+          <a:p>
+            <a:pPr algn="ctr">
+              <a:defRPr sz="2000" b="1">
+                <a:solidFill>
+                  <a:srgbClr val="8A97A8"/>
+                </a:solidFill>
+              </a:defRPr>
+            </a:pPr>
+            <a:r>
+              <a:t>Synthetic Dataset</a:t>
+            </a:r>
+            <a:br/>
+            <a:endParaRPr/>
+          </a:p>
+          <a:p>
+            <a:pPr algn="ctr">
+              <a:defRPr sz="1400">
+                <a:solidFill>
+                  <a:srgbClr val="FFFFFF"/>
+                </a:solidFill>
+              </a:defRPr>
+            </a:pPr>
+            <a:r>
+              <a:t>While AI4I 2020 strictly mirrors physical laws, models must be fine-tuned on physical sensor streams before production deployment.</a:t>
+            </a:r>
+          </a:p>
+        </p:txBody>
+      </p:sp>
+    </p:spTree>
+  </p:cSld>
+  <p:clrMapOvr>
+    <a:masterClrMapping/>
+  </p:clrMapOvr>
+  <p:transition spd="slow">
+    <p:push dir="u"/>
+  </p:transition>
+</p:sld>
+</file>
+
+<file path=ppt/slides/slide21.xml><?xml version="1.0" encoding="utf-8"?>
+<p:sld xmlns:a="http://schemas.openxmlformats.org/drawingml/2006/main" xmlns:r="http://schemas.openxmlformats.org/officeDocument/2006/relationships" xmlns:p="http://schemas.openxmlformats.org/presentationml/2006/main">
+  <p:cSld>
+    <p:bg>
+      <p:bgPr>
+        <a:solidFill>
+          <a:srgbClr val="05070D"/>
+        </a:solidFill>
+        <a:effectLst/>
+      </p:bgPr>
+    </p:bg>
+    <p:spTree>
+      <p:nvGrpSpPr>
+        <p:cNvPr id="1" name=""/>
+        <p:cNvGrpSpPr/>
+        <p:nvPr/>
+      </p:nvGrpSpPr>
+      <p:grpSpPr>
+        <a:xfrm>
+          <a:off x="0" y="0"/>
+          <a:ext cx="0" cy="0"/>
+          <a:chOff x="0" y="0"/>
+          <a:chExt cx="0" cy="0"/>
+        </a:xfrm>
+      </p:grpSpPr>
+      <p:sp>
+        <p:nvSpPr>
+          <p:cNvPr id="2" name="TextBox 1"/>
+          <p:cNvSpPr txBox="1"/>
+          <p:nvPr/>
+        </p:nvSpPr>
+        <p:spPr>
+          <a:xfrm>
+            <a:off x="457200" y="457200"/>
+            <a:ext cx="10972800" cy="457200"/>
+          </a:xfrm>
+          <a:prstGeom prst="rect">
+            <a:avLst/>
+          </a:prstGeom>
+          <a:noFill/>
+        </p:spPr>
+        <p:txBody>
+          <a:bodyPr wrap="none">
+            <a:spAutoFit/>
+          </a:bodyPr>
+          <a:lstStyle/>
+          <a:p>
+            <a:endParaRPr/>
+          </a:p>
+          <a:p>
+            <a:pPr>
+              <a:defRPr sz="1200" b="1">
+                <a:solidFill>
+                  <a:srgbClr val="5FD4E8"/>
+                </a:solidFill>
+                <a:latin typeface="Arial"/>
+              </a:defRPr>
+            </a:pPr>
+            <a:r>
               <a:t>20 / FUTURE WORK</a:t>
             </a:r>
           </a:p>
@@ -6528,7 +8326,7 @@
 </p:sld>
 </file>
 
-<file path=ppt/slides/slide21.xml><?xml version="1.0" encoding="utf-8"?>
+<file path=ppt/slides/slide22.xml><?xml version="1.0" encoding="utf-8"?>
 <p:sld xmlns:a="http://schemas.openxmlformats.org/drawingml/2006/main" xmlns:r="http://schemas.openxmlformats.org/officeDocument/2006/relationships" xmlns:p="http://schemas.openxmlformats.org/presentationml/2006/main">
   <p:cSld>
     <p:bg>
@@ -6854,7 +8652,7 @@
           </a:bodyPr>
           <a:lstStyle/>
           <a:p>
-            <a:endParaRPr/>
+            <a:endParaRPr dirty="0"/>
           </a:p>
           <a:p>
             <a:pPr>
@@ -6866,6 +8664,7 @@
               </a:defRPr>
             </a:pPr>
             <a:r>
+              <a:rPr dirty="0"/>
               <a:t>Why Predictive Maintenance?</a:t>
             </a:r>
           </a:p>
